--- a/deliverables/Video-based-Six-Step-Handwashing-Assessment.pptx
+++ b/deliverables/Video-based-Six-Step-Handwashing-Assessment.pptx
@@ -5,70 +5,48 @@
     <p:sldMasterId id="2147483648" r:id="rId1"/>
   </p:sldMasterIdLst>
   <p:notesMasterIdLst>
-    <p:notesMasterId r:id="rId4"/>
+    <p:notesMasterId r:id="rId13"/>
   </p:notesMasterIdLst>
   <p:sldIdLst>
-    <p:sldId id="256" r:id="rId3"/>
-    <p:sldId id="257" r:id="rId5"/>
-    <p:sldId id="258" r:id="rId6"/>
-    <p:sldId id="259" r:id="rId7"/>
-    <p:sldId id="260" r:id="rId8"/>
-    <p:sldId id="261" r:id="rId9"/>
-    <p:sldId id="262" r:id="rId10"/>
-    <p:sldId id="263" r:id="rId11"/>
-    <p:sldId id="264" r:id="rId12"/>
-    <p:sldId id="265" r:id="rId13"/>
+    <p:sldId id="256" r:id="rId2"/>
+    <p:sldId id="257" r:id="rId3"/>
+    <p:sldId id="258" r:id="rId4"/>
+    <p:sldId id="259" r:id="rId5"/>
+    <p:sldId id="260" r:id="rId6"/>
+    <p:sldId id="261" r:id="rId7"/>
+    <p:sldId id="262" r:id="rId8"/>
+    <p:sldId id="266" r:id="rId9"/>
+    <p:sldId id="263" r:id="rId10"/>
+    <p:sldId id="264" r:id="rId11"/>
+    <p:sldId id="265" r:id="rId12"/>
   </p:sldIdLst>
-  <p:sldSz cx="12191365" cy="6858000"/>
-  <p:notesSz cx="6858000" cy="12191365"/>
+  <p:sldSz cx="12192000" cy="6858000"/>
+  <p:notesSz cx="6858000" cy="12192000"/>
   <p:embeddedFontLst>
     <p:embeddedFont>
-      <p:font typeface="Funnel Sans SemiBold" pitchFamily="34" charset="0"/>
-      <p:regular r:id="rId17"/>
+      <p:font typeface="Consolas" panose="020B0609020204030204" pitchFamily="49" charset="0"/>
+      <p:regular r:id="rId14"/>
+      <p:bold r:id="rId15"/>
+      <p:italic r:id="rId16"/>
+      <p:boldItalic r:id="rId17"/>
     </p:embeddedFont>
     <p:embeddedFont>
-      <p:font typeface="Funnel Sans SemiBold" pitchFamily="34" charset="-122"/>
+      <p:font typeface="Funnel Display Medium" pitchFamily="2" charset="0"/>
       <p:regular r:id="rId18"/>
     </p:embeddedFont>
     <p:embeddedFont>
-      <p:font typeface="Funnel Sans SemiBold" pitchFamily="34" charset="-120"/>
+      <p:font typeface="Funnel Display SemiBold" pitchFamily="2" charset="0"/>
       <p:regular r:id="rId19"/>
+      <p:bold r:id="rId20"/>
     </p:embeddedFont>
     <p:embeddedFont>
-      <p:font typeface="Funnel Display Medium" pitchFamily="34" charset="0"/>
-      <p:regular r:id="rId20"/>
-    </p:embeddedFont>
-    <p:embeddedFont>
-      <p:font typeface="Funnel Display Medium" pitchFamily="34" charset="-122"/>
+      <p:font typeface="Funnel Sans" pitchFamily="2" charset="0"/>
       <p:regular r:id="rId21"/>
     </p:embeddedFont>
     <p:embeddedFont>
-      <p:font typeface="Funnel Display Medium" pitchFamily="34" charset="-120"/>
+      <p:font typeface="Funnel Sans SemiBold" pitchFamily="2" charset="0"/>
       <p:regular r:id="rId22"/>
-    </p:embeddedFont>
-    <p:embeddedFont>
-      <p:font typeface="Funnel Sans" pitchFamily="34" charset="0"/>
-      <p:regular r:id="rId23"/>
-    </p:embeddedFont>
-    <p:embeddedFont>
-      <p:font typeface="Funnel Sans" pitchFamily="34" charset="-122"/>
-      <p:regular r:id="rId24"/>
-    </p:embeddedFont>
-    <p:embeddedFont>
-      <p:font typeface="Funnel Sans" pitchFamily="34" charset="-120"/>
-      <p:regular r:id="rId25"/>
-    </p:embeddedFont>
-    <p:embeddedFont>
-      <p:font typeface="Funnel Display SemiBold" pitchFamily="34" charset="0"/>
-      <p:regular r:id="rId26"/>
-    </p:embeddedFont>
-    <p:embeddedFont>
-      <p:font typeface="Funnel Display SemiBold" pitchFamily="34" charset="-122"/>
-      <p:regular r:id="rId27"/>
-    </p:embeddedFont>
-    <p:embeddedFont>
-      <p:font typeface="Funnel Display SemiBold" pitchFamily="34" charset="-120"/>
-      <p:regular r:id="rId28"/>
+      <p:bold r:id="rId23"/>
     </p:embeddedFont>
   </p:embeddedFontLst>
   <p:defaultTextStyle>
@@ -163,6 +141,11 @@
       </a:defRPr>
     </a:lvl9pPr>
   </p:defaultTextStyle>
+  <p:extLst>
+    <p:ext uri="{EFAFB233-063F-42B5-8137-9DF3F51BA10A}">
+      <p15:sldGuideLst xmlns:p15="http://schemas.microsoft.com/office/powerpoint/2012/main"/>
+    </p:ext>
+  </p:extLst>
 </p:presentation>
 </file>
 
@@ -248,6 +231,7 @@
           <a:p>
             <a:fld id="{5282F153-3F37-0F45-9E97-73ACFA13230C}" type="datetimeFigureOut">
               <a:rPr lang="en-US"/>
+              <a:t>10/5/26</a:t>
             </a:fld>
             <a:endParaRPr lang="en-US"/>
           </a:p>
@@ -314,7 +298,6 @@
               <a:rPr lang="en-US"/>
               <a:t>Click to edit Master text styles</a:t>
             </a:r>
-            <a:endParaRPr lang="en-US"/>
           </a:p>
           <a:p>
             <a:pPr lvl="1"/>
@@ -322,7 +305,6 @@
               <a:rPr lang="en-US"/>
               <a:t>Second level</a:t>
             </a:r>
-            <a:endParaRPr lang="en-US"/>
           </a:p>
           <a:p>
             <a:pPr lvl="2"/>
@@ -330,7 +312,6 @@
               <a:rPr lang="en-US"/>
               <a:t>Third level</a:t>
             </a:r>
-            <a:endParaRPr lang="en-US"/>
           </a:p>
           <a:p>
             <a:pPr lvl="3"/>
@@ -338,7 +319,6 @@
               <a:rPr lang="en-US"/>
               <a:t>Fourth level</a:t>
             </a:r>
-            <a:endParaRPr lang="en-US"/>
           </a:p>
           <a:p>
             <a:pPr lvl="4"/>
@@ -346,7 +326,6 @@
               <a:rPr lang="en-US"/>
               <a:t>Fifth level</a:t>
             </a:r>
-            <a:endParaRPr lang="en-US"/>
           </a:p>
         </p:txBody>
       </p:sp>
@@ -410,6 +389,7 @@
           <a:p>
             <a:fld id="{CE5E9CC1-C706-0F49-92D6-E571CC5EEA8F}" type="slidenum">
               <a:rPr lang="en-US"/>
+              <a:t>‹#›</a:t>
             </a:fld>
             <a:endParaRPr lang="en-US"/>
           </a:p>
@@ -562,7 +542,6 @@
               <a:t>Introduce the four owners and the current delivery: cloud training with local camera inference. This first presentation covers goals, data, techniques and progress.
 Source: https://github.com/Frostash030612/handwash-who-six-step/blob/8d7269c/docs/IMPLEMENTATION_PLAN.zh-CN.md</a:t>
             </a:r>
-            <a:endParaRPr lang="en-US" dirty="0"/>
           </a:p>
         </p:txBody>
       </p:sp>
@@ -583,6 +562,7 @@
           <a:p>
             <a:fld id="{F7021451-1387-4CA6-816F-3879F97B5CBC}" type="slidenum">
               <a:rPr lang="en-US"/>
+              <a:t>1</a:t>
             </a:fld>
             <a:endParaRPr lang="en-US"/>
           </a:p>
@@ -642,11 +622,12 @@
           <a:p>
             <a:r>
               <a:rPr lang="en-US" dirty="0"/>
-              <a:t>The current execution order is data quality, cloud training, local video validation, then real-camera acceptance. The repository still marks formal training as pending, so no running training job or completed result is claimed.
+              <a:t>396 is the documented contract-test count in CHANGELOG, not a newly measured test result. A CI workflow exists, but its latest remote execution status has not been independently confirmed. No formal result under the experiment protocol exists yet. The demo-model numbers (85.1% top-1 on consensus validation frames; 87.0% to 93.6% frame agreement with the GRU head on 23 test videos) are preliminary.
+Source: https://github.com/Frostash030612/handwash-who-six-step/blob/8d7269c/CHANGELOG.md
+Source: https://github.com/Frostash030612/handwash-who-six-step/blob/8d7269c/docs/EXPERIMENTS.md
 Source: https://github.com/Frostash030612/handwash-who-six-step/blob/8d7269c/docs/IMPLEMENTATION_PLAN.zh-CN.md
-Source: https://github.com/Frostash030612/handwash-who-six-step/blob/8d7269c/docs/PROJECT_PLAN_4_WEEK.md</a:t>
-            </a:r>
-            <a:endParaRPr lang="en-US" dirty="0"/>
+Source: https://github.com/Frostash030612/handwash-who-six-step/blob/5dc878c/CHANGELOG.md</a:t>
+            </a:r>
           </a:p>
         </p:txBody>
       </p:sp>
@@ -667,6 +648,92 @@
           <a:p>
             <a:fld id="{F7021451-1387-4CA6-816F-3879F97B5CBC}" type="slidenum">
               <a:rPr lang="en-US"/>
+              <a:t>10</a:t>
+            </a:fld>
+            <a:endParaRPr lang="en-US"/>
+          </a:p>
+        </p:txBody>
+      </p:sp>
+    </p:spTree>
+  </p:cSld>
+  <p:clrMapOvr>
+    <a:masterClrMapping/>
+  </p:clrMapOvr>
+</p:notes>
+</file>
+
+<file path=ppt/notesSlides/notesSlide11.xml><?xml version="1.0" encoding="utf-8"?>
+<p:notes xmlns:a="http://schemas.openxmlformats.org/drawingml/2006/main" xmlns:r="http://schemas.openxmlformats.org/officeDocument/2006/relationships" xmlns:p="http://schemas.openxmlformats.org/presentationml/2006/main">
+  <p:cSld>
+    <p:spTree>
+      <p:nvGrpSpPr>
+        <p:cNvPr id="1" name=""/>
+        <p:cNvGrpSpPr/>
+        <p:nvPr/>
+      </p:nvGrpSpPr>
+      <p:grpSpPr>
+        <a:xfrm>
+          <a:off x="0" y="0"/>
+          <a:ext cx="0" cy="0"/>
+          <a:chOff x="0" y="0"/>
+          <a:chExt cx="0" cy="0"/>
+        </a:xfrm>
+      </p:grpSpPr>
+      <p:sp>
+        <p:nvSpPr>
+          <p:cNvPr id="2" name="Slide Image Placeholder 1"/>
+          <p:cNvSpPr>
+            <a:spLocks noGrp="1" noRot="1" noChangeAspect="1"/>
+          </p:cNvSpPr>
+          <p:nvPr>
+            <p:ph type="sldImg"/>
+          </p:nvPr>
+        </p:nvSpPr>
+        <p:spPr/>
+      </p:sp>
+      <p:sp>
+        <p:nvSpPr>
+          <p:cNvPr id="3" name="Notes Placeholder 2"/>
+          <p:cNvSpPr>
+            <a:spLocks noGrp="1"/>
+          </p:cNvSpPr>
+          <p:nvPr>
+            <p:ph type="body" idx="1"/>
+          </p:nvPr>
+        </p:nvSpPr>
+        <p:spPr/>
+        <p:txBody>
+          <a:bodyPr/>
+          <a:lstStyle/>
+          <a:p>
+            <a:r>
+              <a:rPr lang="en-US" dirty="0"/>
+              <a:t>The execution order is data quality, formal cloud training, local video validation, then real-camera acceptance. A first cloud model (exp.pt, trained on 22 September 2026) and a GRU temporal head already exist and power the demo; the formal training run on the frozen, cleaned splits is still pending.
+Source: https://github.com/Frostash030612/handwash-who-six-step/blob/8d7269c/docs/IMPLEMENTATION_PLAN.zh-CN.md
+Source: https://github.com/Frostash030612/handwash-who-six-step/blob/8d7269c/docs/PROJECT_PLAN_4_WEEK.md
+Source: https://github.com/Frostash030612/handwash-who-six-step/blob/5dc878c/docs/IMPLEMENTATION_PLAN.zh-CN.md</a:t>
+            </a:r>
+          </a:p>
+        </p:txBody>
+      </p:sp>
+      <p:sp>
+        <p:nvSpPr>
+          <p:cNvPr id="4" name="Slide Number Placeholder 3"/>
+          <p:cNvSpPr>
+            <a:spLocks noGrp="1"/>
+          </p:cNvSpPr>
+          <p:nvPr>
+            <p:ph type="sldNum" sz="quarter" idx="10"/>
+          </p:nvPr>
+        </p:nvSpPr>
+        <p:spPr/>
+        <p:txBody>
+          <a:bodyPr/>
+          <a:lstStyle/>
+          <a:p>
+            <a:fld id="{F7021451-1387-4CA6-816F-3879F97B5CBC}" type="slidenum">
+              <a:rPr lang="en-US"/>
+              <a:t>11</a:t>
             </a:fld>
             <a:endParaRPr lang="en-US"/>
           </a:p>
@@ -728,7 +795,6 @@
               <a:rPr lang="en-US" dirty="0"/>
               <a:t>The six names are shortened for presentation. Step 2 involves palm over dorsum with fingers interlaced. Step 3 has opposing palms with interlaced fingers. Step 4 uses the backs of fingers against an opposing palm with fingers interlocked. PSKUS also labels other movements and turning off the faucet. The system must preserve missing, reordered or repeated actions rather than force a fixed six-step sequence.</a:t>
             </a:r>
-            <a:endParaRPr lang="en-US" dirty="0"/>
           </a:p>
         </p:txBody>
       </p:sp>
@@ -749,6 +815,7 @@
           <a:p>
             <a:fld id="{F7021451-1387-4CA6-816F-3879F97B5CBC}" type="slidenum">
               <a:rPr lang="en-US"/>
+              <a:t>2</a:t>
             </a:fld>
             <a:endParaRPr lang="en-US"/>
           </a:p>
@@ -812,7 +879,6 @@
 Source: https://github.com/Frostash030612/handwash-who-six-step/blob/8d7269c/docs/PROJECT_PROPOSAL.md
 Source: https://github.com/Frostash030612/handwash-who-six-step/blob/8d7269c/configs/experiments/live_yolo_frame.yaml</a:t>
             </a:r>
-            <a:endParaRPr lang="en-US" dirty="0"/>
           </a:p>
         </p:txBody>
       </p:sp>
@@ -833,6 +899,7 @@
           <a:p>
             <a:fld id="{F7021451-1387-4CA6-816F-3879F97B5CBC}" type="slidenum">
               <a:rPr lang="en-US"/>
+              <a:t>3</a:t>
             </a:fld>
             <a:endParaRPr lang="en-US"/>
           </a:p>
@@ -892,11 +959,11 @@
           <a:p>
             <a:r>
               <a:rPr lang="en-US" dirty="0"/>
-              <a:t>PSKUS is the main training source. METC and self-recorded clips provide separate evaluation settings. Local download status comes from the supplied team checklist dated 3 October 2026; the repository does not prove a newer local download state.
+              <a:t>PSKUS is the main training source. The current demo model (exp.pt) and its GRU temporal head use PSKUS DataSet1 and DataSet4: 153 videos with two independent annotations, split by video into 107 training, 23 validation and 23 test videos. METC and self-recorded clips provide separate evaluation settings; METC and Kaggle are not downloaded yet. Source totals are not a claim that all files are downloaded or processed.
 Source: https://github.com/Frostash030612/handwash-who-six-step/blob/8d7269c/docs/DATA.md
-Source: https://github.com/Frostash030612/handwash-who-six-step/blob/8d7269c/docs/SELF_RECORDING.md</a:t>
-            </a:r>
-            <a:endParaRPr lang="en-US" dirty="0"/>
+Source: https://github.com/Frostash030612/handwash-who-six-step/blob/8d7269c/docs/SELF_RECORDING.md
+Source: https://github.com/Frostash030612/handwash-who-six-step/blob/5dc878c/docs/zh/DATA.md</a:t>
+            </a:r>
           </a:p>
         </p:txBody>
       </p:sp>
@@ -917,6 +984,7 @@
           <a:p>
             <a:fld id="{F7021451-1387-4CA6-816F-3879F97B5CBC}" type="slidenum">
               <a:rPr lang="en-US"/>
+              <a:t>4</a:t>
             </a:fld>
             <a:endParaRPr lang="en-US"/>
           </a:p>
@@ -979,7 +1047,6 @@
               <a:t>The data split is a planned 70/15/15 starting point with a fixed seed and no source-video leakage. Identity grouping is preferred when trustworthy IDs exist. Every sampled frame retains its own label and real timestamp. Short sequences here preserve data order and action boundaries; the mainline classifier trains on individual frames.
 Source: https://github.com/Frostash030612/handwash-who-six-step/blob/8d7269c/docs/IMPLEMENTATION_PLAN.zh-CN.md</a:t>
             </a:r>
-            <a:endParaRPr lang="en-US" dirty="0"/>
           </a:p>
         </p:txBody>
       </p:sp>
@@ -1000,6 +1067,7 @@
           <a:p>
             <a:fld id="{F7021451-1387-4CA6-816F-3879F97B5CBC}" type="slidenum">
               <a:rPr lang="en-US"/>
+              <a:t>5</a:t>
             </a:fld>
             <a:endParaRPr lang="en-US"/>
           </a:p>
@@ -1059,11 +1127,12 @@
           <a:p>
             <a:r>
               <a:rPr lang="en-US" dirty="0"/>
-              <a:t>YOLO26n-cls uses train.mode frame and temporal.kind none. The live service applies a trailing probability average over received frames with smooth_window 9. This is inference-side smoothing, not a trained temporal model.
+              <a:t>The boxes show the planned formal configuration (live_yolo_frame.yaml): YOLO26n-cls at 224 px with frame training; this run has not been done yet. Today's demo uses exp.pt, an earlier cloud run: YOLO26m-cls at 320 px, trained on 22 September 2026 on 3,250 consensus frames from DataSet1 and DataSet4, with 85.1% top-1 on validation frames where both annotators agree. A GRU temporal head is trained on frozen exp.pt features and reads past frames only; when it is loaded, the live service does not apply the 9-frame probability average.
 Source: https://github.com/Frostash030612/handwash-who-six-step/blob/8d7269c/docs/IMPLEMENTATION_PLAN.zh-CN.md
-Source: https://github.com/Frostash030612/handwash-who-six-step/blob/8d7269c/configs/experiments/live_yolo_frame.yaml</a:t>
-            </a:r>
-            <a:endParaRPr lang="en-US" dirty="0"/>
+Source: https://github.com/Frostash030612/handwash-who-six-step/blob/8d7269c/configs/experiments/live_yolo_frame.yaml
+Source: https://github.com/Frostash030612/handwash-who-six-step/blob/5dc878c/src/handwash/pipelines/exp_demo.py
+Source: https://github.com/Frostash030612/handwash-who-six-step/blob/5dc878c/scripts/train_exp_temporal_head.py</a:t>
+            </a:r>
           </a:p>
         </p:txBody>
       </p:sp>
@@ -1084,6 +1153,7 @@
           <a:p>
             <a:fld id="{F7021451-1387-4CA6-816F-3879F97B5CBC}" type="slidenum">
               <a:rPr lang="en-US"/>
+              <a:t>6</a:t>
             </a:fld>
             <a:endParaRPr lang="en-US"/>
           </a:p>
@@ -1143,11 +1213,11 @@
           <a:p>
             <a:r>
               <a:rPr lang="en-US" dirty="0"/>
-              <a:t>The live backend and camera page exist at code level. The four blocks describe the implemented interaction rather than measured performance. The demonstration entry is python scripts/run_camera.py --demo-exp.
+              <a:t>The live backend and camera page run locally with the demo model (exp.pt + GRU temporal head). The input can be a camera or a local video for offline validation. The four blocks describe the implemented interaction rather than measured performance. Live results use only frames received so far; the final report is computed when the session stops. The demonstration entry is python scripts/run_camera.py --demo-exp.
 Source: https://github.com/Frostash030612/handwash-who-six-step/blob/8d7269c/docs/IMPLEMENTATION_PLAN.zh-CN.md
-Source: https://github.com/Frostash030612/handwash-who-six-step/blob/8d7269c/README.md</a:t>
-            </a:r>
-            <a:endParaRPr lang="en-US" dirty="0"/>
+Source: https://github.com/Frostash030612/handwash-who-six-step/blob/8d7269c/README.md
+Source: https://github.com/Frostash030612/handwash-who-six-step/blob/5dc878c/docs/IMPLEMENTATION_PLAN.zh-CN.md</a:t>
+            </a:r>
           </a:p>
         </p:txBody>
       </p:sp>
@@ -1168,6 +1238,7 @@
           <a:p>
             <a:fld id="{F7021451-1387-4CA6-816F-3879F97B5CBC}" type="slidenum">
               <a:rPr lang="en-US"/>
+              <a:t>7</a:t>
             </a:fld>
             <a:endParaRPr lang="en-US"/>
           </a:p>
@@ -1227,11 +1298,9 @@
           <a:p>
             <a:r>
               <a:rPr lang="en-US" dirty="0"/>
-              <a:t>A/B reuse one checkpoint and compare label-change counts as well as recognition and latency. C/D train separate controlled temporal models. The delivery line remains A/B. Evaluate eight PSKUS classes and report the six rubbing steps separately. Report PSKUS, METC and self-recorded results independently. Match segment labels and temporal overlap for segment F1.
-Source: https://github.com/Frostash030612/handwash-who-six-step/blob/8d7269c/docs/EXPERIMENTS.md
-Source: https://github.com/Frostash030612/handwash-who-six-step/blob/8d7269c/docs/IMPLEMENTATION_PLAN.zh-CN.md</a:t>
-            </a:r>
-            <a:endParaRPr lang="en-US" dirty="0"/>
+              <a:t>Left: the local web interface on the public PSKUS clip 2020-06-30_03-29-53_camera102, loaded as a local video; the model combines exp.pt with exp_temporal_head.pt. The displayed actions and per-step durations (5.0 to 8.0 s) are model outputs, not ground truth. Right: the final report from the same clip. All six steps are detected in the correct order, with an overall score of 95. One issue is flagged: 37.2 s of rubbing, below the 40 s WHO recommendation, in a 60.6 s session. Score = 0.5 x coverage + 0.3 x order + 0.2 x duration. The clip was not used for training. It illustrates the workflow and does not demonstrate generalization to a new camera; the score is not a model accuracy measure.
+Source: local screenshots of the project's camera page; original clip 2020-06-30_03-29-53_camera102.mp4 in the local PSKUS demo set.</a:t>
+            </a:r>
           </a:p>
         </p:txBody>
       </p:sp>
@@ -1252,6 +1321,7 @@
           <a:p>
             <a:fld id="{F7021451-1387-4CA6-816F-3879F97B5CBC}" type="slidenum">
               <a:rPr lang="en-US"/>
+              <a:t>8</a:t>
             </a:fld>
             <a:endParaRPr lang="en-US"/>
           </a:p>
@@ -1311,12 +1381,11 @@
           <a:p>
             <a:r>
               <a:rPr lang="en-US" dirty="0"/>
-              <a:t>396 is the documented contract-test count in CHANGELOG, not a newly measured test result. A CI workflow exists, but its latest remote execution status has not been independently confirmed. The only recorded experiment is a synthetic smoke run with metrics explicitly marked meaningless.
-Source: https://github.com/Frostash030612/handwash-who-six-step/blob/8d7269c/CHANGELOG.md
+              <a:t>A/B reuse one checkpoint and compare label-change counts as well as recognition and latency. C/D train separate controlled temporal models. A first D-group model, a GRU head on frozen exp.pt features, already runs in the demo: on the 23 test videos, agreement on frames where all annotators agree rose from 87.0% (exp.pt with 9-frame averaging) to 93.6%, and false order flags fell from 2 videos to 1. These are preliminary results on two PSKUS shards, not the full controlled comparison. Evaluate eight PSKUS classes and report the six rubbing steps separately. Report PSKUS, METC and self-recorded results independently. Match segment labels and temporal overlap for segment F1.
 Source: https://github.com/Frostash030612/handwash-who-six-step/blob/8d7269c/docs/EXPERIMENTS.md
-Source: https://github.com/Frostash030612/handwash-who-six-step/blob/8d7269c/docs/IMPLEMENTATION_PLAN.zh-CN.md</a:t>
-            </a:r>
-            <a:endParaRPr lang="en-US" dirty="0"/>
+Source: https://github.com/Frostash030612/handwash-who-six-step/blob/8d7269c/docs/IMPLEMENTATION_PLAN.zh-CN.md
+Source: https://github.com/Frostash030612/handwash-who-six-step/blob/5dc878c/scripts/train_exp_temporal_head.py</a:t>
+            </a:r>
           </a:p>
         </p:txBody>
       </p:sp>
@@ -1337,6 +1406,7 @@
           <a:p>
             <a:fld id="{F7021451-1387-4CA6-816F-3879F97B5CBC}" type="slidenum">
               <a:rPr lang="en-US"/>
+              <a:t>9</a:t>
             </a:fld>
             <a:endParaRPr lang="en-US"/>
           </a:p>
@@ -1696,7 +1766,7 @@
           <p:nvPr/>
         </p:nvPicPr>
         <p:blipFill>
-          <a:blip r:embed="rId1"/>
+          <a:blip r:embed="rId3"/>
           <a:stretch>
             <a:fillRect/>
           </a:stretch>
@@ -1738,6 +1808,13 @@
             </a:outerShdw>
           </a:effectLst>
         </p:spPr>
+        <p:txBody>
+          <a:bodyPr/>
+          <a:lstStyle/>
+          <a:p>
+            <a:endParaRPr lang="zh-CN" altLang="en-US"/>
+          </a:p>
+        </p:txBody>
       </p:sp>
       <p:sp>
         <p:nvSpPr>
@@ -1958,13 +2035,14 @@
                 <a:solidFill>
                   <a:srgbClr val="2B3541"/>
                 </a:solidFill>
-                <a:latin typeface="Funnel Sans" pitchFamily="34" charset="0"/>
                 <a:ea typeface="Funnel Sans" pitchFamily="34" charset="-122"/>
-                <a:cs typeface="Funnel Sans" pitchFamily="34" charset="-120"/>
+                <a:cs typeface="Times New Roman" panose="02020603050405020304" pitchFamily="18" charset="0"/>
               </a:rPr>
               <a:t>Shen Ziyi — Data &amp; evaluation</a:t>
             </a:r>
-            <a:endParaRPr lang="en-US" sz="1400" dirty="0"/>
+            <a:endParaRPr lang="en-US" sz="1400" dirty="0">
+              <a:cs typeface="Times New Roman" panose="02020603050405020304" pitchFamily="18" charset="0"/>
+            </a:endParaRPr>
           </a:p>
           <a:p>
             <a:pPr marL="0" indent="0" algn="l">
@@ -1978,13 +2056,14 @@
                 <a:solidFill>
                   <a:srgbClr val="2B3541"/>
                 </a:solidFill>
-                <a:latin typeface="Funnel Sans" pitchFamily="34" charset="0"/>
                 <a:ea typeface="Funnel Sans" pitchFamily="34" charset="-122"/>
-                <a:cs typeface="Funnel Sans" pitchFamily="34" charset="-120"/>
+                <a:cs typeface="Times New Roman" panose="02020603050405020304" pitchFamily="18" charset="0"/>
               </a:rPr>
               <a:t>Wang Lepeng — Model &amp; training</a:t>
             </a:r>
-            <a:endParaRPr lang="en-US" sz="1400" dirty="0"/>
+            <a:endParaRPr lang="en-US" sz="1400" dirty="0">
+              <a:cs typeface="Times New Roman" panose="02020603050405020304" pitchFamily="18" charset="0"/>
+            </a:endParaRPr>
           </a:p>
         </p:txBody>
       </p:sp>
@@ -2021,7 +2100,6 @@
                 <a:solidFill>
                   <a:srgbClr val="2B3541"/>
                 </a:solidFill>
-                <a:latin typeface="Funnel Sans" pitchFamily="34" charset="0"/>
                 <a:ea typeface="Funnel Sans" pitchFamily="34" charset="-122"/>
                 <a:cs typeface="Funnel Sans" pitchFamily="34" charset="-120"/>
               </a:rPr>
@@ -2041,7 +2119,6 @@
                 <a:solidFill>
                   <a:srgbClr val="2B3541"/>
                 </a:solidFill>
-                <a:latin typeface="Funnel Sans" pitchFamily="34" charset="0"/>
                 <a:ea typeface="Funnel Sans" pitchFamily="34" charset="-122"/>
                 <a:cs typeface="Funnel Sans" pitchFamily="34" charset="-120"/>
               </a:rPr>
@@ -2092,7 +2169,7 @@
         </p:nvSpPr>
         <p:spPr>
           <a:xfrm>
-            <a:off x="609585" y="431800"/>
+            <a:off x="609585" y="457200"/>
             <a:ext cx="11582110" cy="190500"/>
           </a:xfrm>
           <a:prstGeom prst="rect">
@@ -2119,7 +2196,7 @@
                 <a:ea typeface="Funnel Sans SemiBold" pitchFamily="34" charset="-122"/>
                 <a:cs typeface="Funnel Sans SemiBold" pitchFamily="34" charset="-120"/>
               </a:rPr>
-              <a:t>PROJECT ROADMAP</a:t>
+              <a:t>WHAT ALREADY WORKS</a:t>
             </a:r>
             <a:endParaRPr lang="en-US" sz="1200" dirty="0"/>
           </a:p>
@@ -2133,7 +2210,7 @@
         </p:nvSpPr>
         <p:spPr>
           <a:xfrm>
-            <a:off x="609585" y="708025"/>
+            <a:off x="609585" y="733425"/>
             <a:ext cx="10972526" cy="484584"/>
           </a:xfrm>
           <a:prstGeom prst="rect">
@@ -2160,7 +2237,7 @@
                 <a:ea typeface="Funnel Display Medium" pitchFamily="34" charset="-122"/>
                 <a:cs typeface="Funnel Display Medium" pitchFamily="34" charset="-120"/>
               </a:rPr>
-              <a:t>Course anchors and technical steps</a:t>
+              <a:t>Progress so far</a:t>
             </a:r>
             <a:endParaRPr lang="en-US" sz="3600" dirty="0"/>
           </a:p>
@@ -2168,59 +2245,18 @@
       </p:sp>
       <p:sp>
         <p:nvSpPr>
-          <p:cNvPr id="4" name="Text 2"/>
-          <p:cNvSpPr/>
-          <p:nvPr/>
-        </p:nvSpPr>
-        <p:spPr>
-          <a:xfrm>
-            <a:off x="609585" y="1398984"/>
-            <a:ext cx="4206075" cy="190500"/>
-          </a:xfrm>
-          <a:prstGeom prst="rect">
-            <a:avLst/>
-          </a:prstGeom>
-          <a:noFill/>
-        </p:spPr>
-        <p:txBody>
-          <a:bodyPr wrap="none" lIns="0" tIns="0" rIns="0" bIns="0" rtlCol="0" anchor="t"/>
-          <a:lstStyle/>
-          <a:p>
-            <a:pPr marL="0" indent="0" algn="l">
-              <a:lnSpc>
-                <a:spcPct val="104000"/>
-              </a:lnSpc>
-              <a:buNone/>
-            </a:pPr>
-            <a:r>
-              <a:rPr lang="en-US" sz="1200" kern="100" spc="96" dirty="0">
-                <a:solidFill>
-                  <a:srgbClr val="8A3FA8"/>
-                </a:solidFill>
-                <a:latin typeface="Funnel Sans SemiBold" pitchFamily="34" charset="0"/>
-                <a:ea typeface="Funnel Sans SemiBold" pitchFamily="34" charset="-122"/>
-                <a:cs typeface="Funnel Sans SemiBold" pitchFamily="34" charset="-120"/>
-              </a:rPr>
-              <a:t>COURSE ANCHORS</a:t>
-            </a:r>
-            <a:endParaRPr lang="en-US" sz="1200" dirty="0"/>
-          </a:p>
-        </p:txBody>
-      </p:sp>
-      <p:sp>
-        <p:nvSpPr>
-          <p:cNvPr id="5" name="Shape 3"/>
-          <p:cNvSpPr/>
-          <p:nvPr/>
-        </p:nvSpPr>
-        <p:spPr>
-          <a:xfrm>
-            <a:off x="609585" y="1710134"/>
-            <a:ext cx="4206075" cy="2954238"/>
+          <p:cNvPr id="4" name="Shape 2"/>
+          <p:cNvSpPr/>
+          <p:nvPr/>
+        </p:nvSpPr>
+        <p:spPr>
+          <a:xfrm>
+            <a:off x="609585" y="1553369"/>
+            <a:ext cx="3454314" cy="3530005"/>
           </a:xfrm>
           <a:prstGeom prst="roundRect">
             <a:avLst>
-              <a:gd name="adj" fmla="val 2979"/>
+              <a:gd name="adj" fmla="val 2548"/>
             </a:avLst>
           </a:prstGeom>
           <a:solidFill>
@@ -2234,17 +2270,48 @@
             </a:outerShdw>
           </a:effectLst>
         </p:spPr>
-      </p:sp>
-      <p:sp>
-        <p:nvSpPr>
-          <p:cNvPr id="6" name="Text 4"/>
-          <p:cNvSpPr/>
-          <p:nvPr/>
-        </p:nvSpPr>
-        <p:spPr>
-          <a:xfrm>
-            <a:off x="863578" y="1913334"/>
-            <a:ext cx="3698088" cy="281880"/>
+        <p:txBody>
+          <a:bodyPr/>
+          <a:lstStyle/>
+          <a:p>
+            <a:endParaRPr lang="zh-CN" altLang="en-US"/>
+          </a:p>
+        </p:txBody>
+      </p:sp>
+      <p:pic>
+        <p:nvPicPr>
+          <p:cNvPr id="5" name="Image 0" descr="preencoded.png"/>
+          <p:cNvPicPr>
+            <a:picLocks noChangeAspect="1"/>
+          </p:cNvPicPr>
+          <p:nvPr/>
+        </p:nvPicPr>
+        <p:blipFill>
+          <a:blip r:embed="rId3"/>
+          <a:stretch>
+            <a:fillRect/>
+          </a:stretch>
+        </p:blipFill>
+        <p:spPr>
+          <a:xfrm>
+            <a:off x="863578" y="1832769"/>
+            <a:ext cx="523862" cy="523875"/>
+          </a:xfrm>
+          <a:prstGeom prst="rect">
+            <a:avLst/>
+          </a:prstGeom>
+        </p:spPr>
+      </p:pic>
+      <p:sp>
+        <p:nvSpPr>
+          <p:cNvPr id="6" name="Text 3"/>
+          <p:cNvSpPr/>
+          <p:nvPr/>
+        </p:nvSpPr>
+        <p:spPr>
+          <a:xfrm>
+            <a:off x="863578" y="2477294"/>
+            <a:ext cx="2946326" cy="281880"/>
           </a:xfrm>
           <a:prstGeom prst="rect">
             <a:avLst/>
@@ -2270,7 +2337,7 @@
                 <a:ea typeface="Funnel Sans SemiBold" pitchFamily="34" charset="-122"/>
                 <a:cs typeface="Funnel Sans SemiBold" pitchFamily="34" charset="-120"/>
               </a:rPr>
-              <a:t>30 Sep 2026</a:t>
+              <a:t>Repository and contracts</a:t>
             </a:r>
             <a:endParaRPr lang="en-US" sz="1850" dirty="0"/>
           </a:p>
@@ -2278,32 +2345,37 @@
       </p:sp>
       <p:sp>
         <p:nvSpPr>
-          <p:cNvPr id="7" name="Text 5"/>
-          <p:cNvSpPr/>
-          <p:nvPr/>
-        </p:nvSpPr>
-        <p:spPr>
-          <a:xfrm>
-            <a:off x="863578" y="2344440"/>
-            <a:ext cx="3952082" cy="293291"/>
-          </a:xfrm>
-          <a:prstGeom prst="rect">
-            <a:avLst/>
-          </a:prstGeom>
-          <a:noFill/>
-        </p:spPr>
-        <p:txBody>
-          <a:bodyPr wrap="none" lIns="0" tIns="0" rIns="0" bIns="0" rtlCol="0" anchor="t"/>
+          <p:cNvPr id="7" name="Text 4"/>
+          <p:cNvSpPr/>
+          <p:nvPr/>
+        </p:nvSpPr>
+        <p:spPr>
+          <a:xfrm>
+            <a:off x="863578" y="2908399"/>
+            <a:ext cx="2946326" cy="1364853"/>
+          </a:xfrm>
+          <a:prstGeom prst="rect">
+            <a:avLst/>
+          </a:prstGeom>
+          <a:noFill/>
+        </p:spPr>
+        <p:txBody>
+          <a:bodyPr wrap="square" lIns="0" tIns="0" rIns="0" bIns="0" rtlCol="0" anchor="t">
+            <a:normAutofit/>
+          </a:bodyPr>
           <a:lstStyle/>
           <a:p>
             <a:pPr marL="0" indent="0" algn="l">
               <a:lnSpc>
                 <a:spcPct val="117000"/>
               </a:lnSpc>
-              <a:buNone/>
-            </a:pPr>
-            <a:r>
-              <a:rPr lang="en-US" sz="1650" dirty="0">
+              <a:spcAft>
+                <a:spcPts val="900"/>
+              </a:spcAft>
+              <a:buNone/>
+            </a:pPr>
+            <a:r>
+              <a:rPr lang="en-US" sz="1400" dirty="0">
                 <a:solidFill>
                   <a:srgbClr val="2B3541"/>
                 </a:solidFill>
@@ -2311,30 +2383,111 @@
                 <a:ea typeface="Funnel Sans" pitchFamily="34" charset="-122"/>
                 <a:cs typeface="Funnel Sans" pitchFamily="34" charset="-120"/>
               </a:rPr>
-              <a:t>Proposal submitted · done</a:t>
-            </a:r>
-            <a:endParaRPr lang="en-US" sz="1650" dirty="0"/>
-          </a:p>
-        </p:txBody>
-      </p:sp>
-      <p:sp>
-        <p:nvSpPr>
-          <p:cNvPr id="8" name="Text 6"/>
-          <p:cNvSpPr/>
-          <p:nvPr/>
-        </p:nvSpPr>
-        <p:spPr>
-          <a:xfrm>
-            <a:off x="863578" y="2825055"/>
-            <a:ext cx="3698088" cy="281880"/>
-          </a:xfrm>
-          <a:prstGeom prst="rect">
-            <a:avLst/>
-          </a:prstGeom>
-          <a:noFill/>
-        </p:spPr>
-        <p:txBody>
-          <a:bodyPr wrap="none" lIns="0" tIns="0" rIns="0" bIns="0" rtlCol="0" anchor="t"/>
+              <a:t>Five layers and five CLI pipelines: prepare, train, evaluate, infer, assess.</a:t>
+            </a:r>
+            <a:endParaRPr lang="en-US" sz="1400" dirty="0"/>
+          </a:p>
+          <a:p>
+            <a:pPr marL="0" indent="0" algn="l">
+              <a:lnSpc>
+                <a:spcPct val="117000"/>
+              </a:lnSpc>
+              <a:buNone/>
+            </a:pPr>
+            <a:r>
+              <a:rPr lang="en-US" sz="1400" dirty="0">
+                <a:solidFill>
+                  <a:srgbClr val="2B3541"/>
+                </a:solidFill>
+                <a:latin typeface="Funnel Sans" pitchFamily="34" charset="0"/>
+                <a:ea typeface="Funnel Sans" pitchFamily="34" charset="-122"/>
+                <a:cs typeface="Funnel Sans" pitchFamily="34" charset="-120"/>
+              </a:rPr>
+              <a:t>396 contract-layer tests documented; no data or GPU required. CI workflow configured.</a:t>
+            </a:r>
+            <a:endParaRPr lang="en-US" sz="1400" dirty="0"/>
+          </a:p>
+        </p:txBody>
+      </p:sp>
+      <p:sp>
+        <p:nvSpPr>
+          <p:cNvPr id="8" name="Shape 5"/>
+          <p:cNvSpPr/>
+          <p:nvPr/>
+        </p:nvSpPr>
+        <p:spPr>
+          <a:xfrm>
+            <a:off x="4368691" y="1553369"/>
+            <a:ext cx="3454314" cy="3530005"/>
+          </a:xfrm>
+          <a:prstGeom prst="roundRect">
+            <a:avLst>
+              <a:gd name="adj" fmla="val 2548"/>
+            </a:avLst>
+          </a:prstGeom>
+          <a:solidFill>
+            <a:srgbClr val="FFFCF6"/>
+          </a:solidFill>
+          <a:effectLst>
+            <a:outerShdw blurRad="379730" dist="151130" dir="5400000" algn="bl" rotWithShape="0">
+              <a:srgbClr val="6A4FC8">
+                <a:alpha val="40000"/>
+              </a:srgbClr>
+            </a:outerShdw>
+          </a:effectLst>
+        </p:spPr>
+        <p:txBody>
+          <a:bodyPr/>
+          <a:lstStyle/>
+          <a:p>
+            <a:endParaRPr lang="zh-CN" altLang="en-US"/>
+          </a:p>
+        </p:txBody>
+      </p:sp>
+      <p:pic>
+        <p:nvPicPr>
+          <p:cNvPr id="9" name="Image 1" descr="preencoded.png"/>
+          <p:cNvPicPr>
+            <a:picLocks noChangeAspect="1"/>
+          </p:cNvPicPr>
+          <p:nvPr/>
+        </p:nvPicPr>
+        <p:blipFill>
+          <a:blip r:embed="rId4"/>
+          <a:stretch>
+            <a:fillRect/>
+          </a:stretch>
+        </p:blipFill>
+        <p:spPr>
+          <a:xfrm>
+            <a:off x="4622684" y="1832769"/>
+            <a:ext cx="523862" cy="523875"/>
+          </a:xfrm>
+          <a:prstGeom prst="rect">
+            <a:avLst/>
+          </a:prstGeom>
+        </p:spPr>
+      </p:pic>
+      <p:sp>
+        <p:nvSpPr>
+          <p:cNvPr id="10" name="Text 6"/>
+          <p:cNvSpPr/>
+          <p:nvPr/>
+        </p:nvSpPr>
+        <p:spPr>
+          <a:xfrm>
+            <a:off x="4622684" y="2477294"/>
+            <a:ext cx="2946326" cy="563761"/>
+          </a:xfrm>
+          <a:prstGeom prst="rect">
+            <a:avLst/>
+          </a:prstGeom>
+          <a:noFill/>
+        </p:spPr>
+        <p:txBody>
+          <a:bodyPr wrap="square" lIns="0" tIns="0" rIns="0" bIns="0" rtlCol="0" anchor="t">
+            <a:normAutofit lnSpcReduction="10000"/>
+          </a:bodyPr>
           <a:lstStyle/>
           <a:p>
             <a:pPr marL="0" indent="0" algn="l">
@@ -2352,7 +2505,7 @@
                 <a:ea typeface="Funnel Sans SemiBold" pitchFamily="34" charset="-122"/>
                 <a:cs typeface="Funnel Sans SemiBold" pitchFamily="34" charset="-120"/>
               </a:rPr>
-              <a:t>6 Oct 2026</a:t>
+              <a:t>Data safeguards and report rules</a:t>
             </a:r>
             <a:endParaRPr lang="en-US" sz="1850" dirty="0"/>
           </a:p>
@@ -2360,32 +2513,37 @@
       </p:sp>
       <p:sp>
         <p:nvSpPr>
-          <p:cNvPr id="9" name="Text 7"/>
-          <p:cNvSpPr/>
-          <p:nvPr/>
-        </p:nvSpPr>
-        <p:spPr>
-          <a:xfrm>
-            <a:off x="863578" y="3256161"/>
-            <a:ext cx="3952082" cy="293291"/>
-          </a:xfrm>
-          <a:prstGeom prst="rect">
-            <a:avLst/>
-          </a:prstGeom>
-          <a:noFill/>
-        </p:spPr>
-        <p:txBody>
-          <a:bodyPr wrap="none" lIns="0" tIns="0" rIns="0" bIns="0" rtlCol="0" anchor="t"/>
+          <p:cNvPr id="11" name="Text 7"/>
+          <p:cNvSpPr/>
+          <p:nvPr/>
+        </p:nvSpPr>
+        <p:spPr>
+          <a:xfrm>
+            <a:off x="4622684" y="3190280"/>
+            <a:ext cx="2946326" cy="1613694"/>
+          </a:xfrm>
+          <a:prstGeom prst="rect">
+            <a:avLst/>
+          </a:prstGeom>
+          <a:noFill/>
+        </p:spPr>
+        <p:txBody>
+          <a:bodyPr wrap="square" lIns="0" tIns="0" rIns="0" bIns="0" rtlCol="0" anchor="t">
+            <a:normAutofit/>
+          </a:bodyPr>
           <a:lstStyle/>
           <a:p>
             <a:pPr marL="0" indent="0" algn="l">
               <a:lnSpc>
                 <a:spcPct val="117000"/>
               </a:lnSpc>
-              <a:buNone/>
-            </a:pPr>
-            <a:r>
-              <a:rPr lang="en-US" sz="1650" dirty="0">
+              <a:spcAft>
+                <a:spcPts val="900"/>
+              </a:spcAft>
+              <a:buNone/>
+            </a:pPr>
+            <a:r>
+              <a:rPr lang="en-US" sz="1400" dirty="0">
                 <a:solidFill>
                   <a:srgbClr val="2B3541"/>
                 </a:solidFill>
@@ -2393,22 +2551,101 @@
                 <a:ea typeface="Funnel Sans" pitchFamily="34" charset="-122"/>
                 <a:cs typeface="Funnel Sans" pitchFamily="34" charset="-120"/>
               </a:rPr>
-              <a:t>First presentation · today</a:t>
-            </a:r>
-            <a:endParaRPr lang="en-US" sz="1650" dirty="0"/>
-          </a:p>
-        </p:txBody>
-      </p:sp>
-      <p:sp>
-        <p:nvSpPr>
-          <p:cNvPr id="10" name="Text 8"/>
-          <p:cNvSpPr/>
-          <p:nvPr/>
-        </p:nvSpPr>
-        <p:spPr>
-          <a:xfrm>
-            <a:off x="863578" y="3736777"/>
-            <a:ext cx="3698088" cy="281880"/>
+              <a:t>Three independent video-split guards and one authoritative label space, including METC 0–6.</a:t>
+            </a:r>
+            <a:endParaRPr lang="en-US" sz="1400" dirty="0"/>
+          </a:p>
+          <a:p>
+            <a:pPr marL="0" indent="0" algn="l">
+              <a:lnSpc>
+                <a:spcPct val="117000"/>
+              </a:lnSpc>
+              <a:buNone/>
+            </a:pPr>
+            <a:r>
+              <a:rPr lang="en-US" sz="1400" dirty="0">
+                <a:solidFill>
+                  <a:srgbClr val="2B3541"/>
+                </a:solidFill>
+                <a:latin typeface="Funnel Sans" pitchFamily="34" charset="0"/>
+                <a:ea typeface="Funnel Sans" pitchFamily="34" charset="-122"/>
+                <a:cs typeface="Funnel Sans" pitchFamily="34" charset="-120"/>
+              </a:rPr>
+              <a:t>Missed steps, order inversions, short steps, repetitions and overall score are implemented.</a:t>
+            </a:r>
+            <a:endParaRPr lang="en-US" sz="1400" dirty="0"/>
+          </a:p>
+        </p:txBody>
+      </p:sp>
+      <p:sp>
+        <p:nvSpPr>
+          <p:cNvPr id="12" name="Shape 8"/>
+          <p:cNvSpPr/>
+          <p:nvPr/>
+        </p:nvSpPr>
+        <p:spPr>
+          <a:xfrm>
+            <a:off x="8127797" y="1553369"/>
+            <a:ext cx="3454314" cy="3530005"/>
+          </a:xfrm>
+          <a:prstGeom prst="roundRect">
+            <a:avLst>
+              <a:gd name="adj" fmla="val 2548"/>
+            </a:avLst>
+          </a:prstGeom>
+          <a:solidFill>
+            <a:srgbClr val="FFFCF6"/>
+          </a:solidFill>
+          <a:effectLst>
+            <a:outerShdw blurRad="379730" dist="151130" dir="5400000" algn="bl" rotWithShape="0">
+              <a:srgbClr val="6A4FC8">
+                <a:alpha val="40000"/>
+              </a:srgbClr>
+            </a:outerShdw>
+          </a:effectLst>
+        </p:spPr>
+        <p:txBody>
+          <a:bodyPr/>
+          <a:lstStyle/>
+          <a:p>
+            <a:endParaRPr lang="zh-CN" altLang="en-US"/>
+          </a:p>
+        </p:txBody>
+      </p:sp>
+      <p:pic>
+        <p:nvPicPr>
+          <p:cNvPr id="13" name="Image 2" descr="preencoded.png"/>
+          <p:cNvPicPr>
+            <a:picLocks noChangeAspect="1"/>
+          </p:cNvPicPr>
+          <p:nvPr/>
+        </p:nvPicPr>
+        <p:blipFill>
+          <a:blip r:embed="rId5"/>
+          <a:stretch>
+            <a:fillRect/>
+          </a:stretch>
+        </p:blipFill>
+        <p:spPr>
+          <a:xfrm>
+            <a:off x="8381790" y="1832769"/>
+            <a:ext cx="523862" cy="523875"/>
+          </a:xfrm>
+          <a:prstGeom prst="rect">
+            <a:avLst/>
+          </a:prstGeom>
+        </p:spPr>
+      </p:pic>
+      <p:sp>
+        <p:nvSpPr>
+          <p:cNvPr id="14" name="Text 9"/>
+          <p:cNvSpPr/>
+          <p:nvPr/>
+        </p:nvSpPr>
+        <p:spPr>
+          <a:xfrm>
+            <a:off x="8381790" y="2477294"/>
+            <a:ext cx="2946326" cy="281880"/>
           </a:xfrm>
           <a:prstGeom prst="rect">
             <a:avLst/>
@@ -2434,7 +2671,7 @@
                 <a:ea typeface="Funnel Sans SemiBold" pitchFamily="34" charset="-122"/>
                 <a:cs typeface="Funnel Sans SemiBold" pitchFamily="34" charset="-120"/>
               </a:rPr>
-              <a:t>31 Oct 2026</a:t>
+              <a:t>Live product code</a:t>
             </a:r>
             <a:endParaRPr lang="en-US" sz="1850" dirty="0"/>
           </a:p>
@@ -2442,32 +2679,37 @@
       </p:sp>
       <p:sp>
         <p:nvSpPr>
-          <p:cNvPr id="11" name="Text 9"/>
-          <p:cNvSpPr/>
-          <p:nvPr/>
-        </p:nvSpPr>
-        <p:spPr>
-          <a:xfrm>
-            <a:off x="863578" y="4167882"/>
-            <a:ext cx="3952082" cy="293291"/>
-          </a:xfrm>
-          <a:prstGeom prst="rect">
-            <a:avLst/>
-          </a:prstGeom>
-          <a:noFill/>
-        </p:spPr>
-        <p:txBody>
-          <a:bodyPr wrap="none" lIns="0" tIns="0" rIns="0" bIns="0" rtlCol="0" anchor="t"/>
+          <p:cNvPr id="15" name="Text 10"/>
+          <p:cNvSpPr/>
+          <p:nvPr/>
+        </p:nvSpPr>
+        <p:spPr>
+          <a:xfrm>
+            <a:off x="8381790" y="2908399"/>
+            <a:ext cx="2946326" cy="1364853"/>
+          </a:xfrm>
+          <a:prstGeom prst="rect">
+            <a:avLst/>
+          </a:prstGeom>
+          <a:noFill/>
+        </p:spPr>
+        <p:txBody>
+          <a:bodyPr wrap="square" lIns="0" tIns="0" rIns="0" bIns="0" rtlCol="0" anchor="t">
+            <a:normAutofit fontScale="92500"/>
+          </a:bodyPr>
           <a:lstStyle/>
           <a:p>
             <a:pPr marL="0" indent="0" algn="l">
               <a:lnSpc>
                 <a:spcPct val="117000"/>
               </a:lnSpc>
-              <a:buNone/>
-            </a:pPr>
-            <a:r>
-              <a:rPr lang="en-US" sz="1650" dirty="0">
+              <a:spcAft>
+                <a:spcPts val="900"/>
+              </a:spcAft>
+              <a:buNone/>
+            </a:pPr>
+            <a:r>
+              <a:rPr lang="en-US" sz="1400" dirty="0">
                 <a:solidFill>
                   <a:srgbClr val="2B3541"/>
                 </a:solidFill>
@@ -2475,22 +2717,56 @@
                 <a:ea typeface="Funnel Sans" pitchFamily="34" charset="-122"/>
                 <a:cs typeface="Funnel Sans" pitchFamily="34" charset="-120"/>
               </a:rPr>
-              <a:t>All deliverables due</a:t>
-            </a:r>
-            <a:endParaRPr lang="en-US" sz="1650" dirty="0"/>
-          </a:p>
-        </p:txBody>
-      </p:sp>
-      <p:sp>
-        <p:nvSpPr>
-          <p:cNvPr id="12" name="Text 10"/>
-          <p:cNvSpPr/>
-          <p:nvPr/>
-        </p:nvSpPr>
-        <p:spPr>
-          <a:xfrm>
-            <a:off x="5272749" y="1398984"/>
-            <a:ext cx="6309361" cy="190500"/>
+              <a:t>Live inference backend and local camera page are in place at code level.</a:t>
+            </a:r>
+            <a:endParaRPr lang="en-US" sz="1400" dirty="0"/>
+          </a:p>
+          <a:p>
+            <a:pPr marL="0" indent="0" algn="l">
+              <a:lnSpc>
+                <a:spcPct val="117000"/>
+              </a:lnSpc>
+              <a:buNone/>
+            </a:pPr>
+            <a:r>
+              <a:rPr lang="en-US" sz="1400" dirty="0">
+                <a:solidFill>
+                  <a:srgbClr val="2B3541"/>
+                </a:solidFill>
+                <a:latin typeface="Funnel Sans" pitchFamily="34" charset="0"/>
+                <a:ea typeface="Funnel Sans" pitchFamily="34" charset="-122"/>
+                <a:cs typeface="Funnel Sans" pitchFamily="34" charset="-120"/>
+              </a:rPr>
+              <a:t>Demo entry: </a:t>
+            </a:r>
+            <a:r>
+              <a:rPr lang="en-US" sz="1400" dirty="0">
+                <a:solidFill>
+                  <a:srgbClr val="2B3541"/>
+                </a:solidFill>
+                <a:highlight>
+                  <a:srgbClr val="FFFCF6"/>
+                </a:highlight>
+                <a:latin typeface="Consolas" pitchFamily="34" charset="0"/>
+                <a:ea typeface="Consolas" pitchFamily="34" charset="-122"/>
+                <a:cs typeface="Consolas" pitchFamily="34" charset="-120"/>
+              </a:rPr>
+              <a:t>python scripts/run_camera.py --demo-exp</a:t>
+            </a:r>
+            <a:endParaRPr lang="en-US" sz="1400" dirty="0"/>
+          </a:p>
+        </p:txBody>
+      </p:sp>
+      <p:sp>
+        <p:nvSpPr>
+          <p:cNvPr id="16" name="Text 11"/>
+          <p:cNvSpPr/>
+          <p:nvPr/>
+        </p:nvSpPr>
+        <p:spPr>
+          <a:xfrm>
+            <a:off x="609585" y="5418733"/>
+            <a:ext cx="10972526" cy="335260"/>
           </a:xfrm>
           <a:prstGeom prst="rect">
             <a:avLst/>
@@ -2503,35 +2779,131 @@
           <a:p>
             <a:pPr marL="0" indent="0" algn="l">
               <a:lnSpc>
-                <a:spcPct val="104000"/>
-              </a:lnSpc>
-              <a:buNone/>
-            </a:pPr>
-            <a:r>
-              <a:rPr lang="en-US" sz="1200" kern="100" spc="96" dirty="0">
-                <a:solidFill>
-                  <a:srgbClr val="8A3FA8"/>
+                <a:spcPct val="100000"/>
+              </a:lnSpc>
+              <a:buNone/>
+            </a:pPr>
+            <a:r>
+              <a:rPr lang="en-US" sz="2200" kern="100" spc="-11" dirty="0">
+                <a:solidFill>
+                  <a:srgbClr val="B8367F"/>
                 </a:solidFill>
                 <a:latin typeface="Funnel Sans SemiBold" pitchFamily="34" charset="0"/>
                 <a:ea typeface="Funnel Sans SemiBold" pitchFamily="34" charset="-122"/>
                 <a:cs typeface="Funnel Sans SemiBold" pitchFamily="34" charset="-120"/>
               </a:rPr>
-              <a:t>TECHNICAL STEPS</a:t>
-            </a:r>
-            <a:endParaRPr lang="en-US" sz="1200" dirty="0"/>
-          </a:p>
-        </p:txBody>
-      </p:sp>
-      <p:sp>
-        <p:nvSpPr>
-          <p:cNvPr id="13" name="Text 11"/>
-          <p:cNvSpPr/>
-          <p:nvPr/>
-        </p:nvSpPr>
-        <p:spPr>
-          <a:xfrm>
-            <a:off x="5272749" y="1752005"/>
-            <a:ext cx="724874" cy="209550"/>
+              <a:t>No formal experimental result yet (version 0.1.0).</a:t>
+            </a:r>
+            <a:endParaRPr lang="en-US" sz="2200" dirty="0"/>
+          </a:p>
+        </p:txBody>
+      </p:sp>
+      <p:sp>
+        <p:nvSpPr>
+          <p:cNvPr id="17" name="Text 12"/>
+          <p:cNvSpPr/>
+          <p:nvPr/>
+        </p:nvSpPr>
+        <p:spPr>
+          <a:xfrm>
+            <a:off x="609585" y="5903218"/>
+            <a:ext cx="10972526" cy="497681"/>
+          </a:xfrm>
+          <a:prstGeom prst="rect">
+            <a:avLst/>
+          </a:prstGeom>
+          <a:noFill/>
+        </p:spPr>
+        <p:txBody>
+          <a:bodyPr wrap="square" lIns="0" tIns="0" rIns="0" bIns="0" rtlCol="0" anchor="t">
+            <a:normAutofit/>
+          </a:bodyPr>
+          <a:lstStyle/>
+          <a:p>
+            <a:pPr marL="0" indent="0" algn="l">
+              <a:lnSpc>
+                <a:spcPct val="117000"/>
+              </a:lnSpc>
+              <a:buNone/>
+            </a:pPr>
+            <a:r>
+              <a:rPr lang="en-US" sz="1400" dirty="0">
+                <a:solidFill>
+                  <a:srgbClr val="2B3541"/>
+                </a:solidFill>
+                <a:latin typeface="Funnel Sans" pitchFamily="34" charset="0"/>
+                <a:ea typeface="Funnel Sans" pitchFamily="34" charset="-122"/>
+                <a:cs typeface="Funnel Sans" pitchFamily="34" charset="-120"/>
+              </a:rPr>
+              <a:t>The synthetic smoke run proves pipeline execution only. Demo-model numbers are preliminary.</a:t>
+            </a:r>
+            <a:endParaRPr lang="en-US" sz="1400" dirty="0"/>
+          </a:p>
+          <a:p>
+            <a:pPr marL="0" indent="0" algn="l">
+              <a:lnSpc>
+                <a:spcPct val="117000"/>
+              </a:lnSpc>
+              <a:buNone/>
+            </a:pPr>
+            <a:r>
+              <a:rPr lang="en-US" sz="1400" dirty="0">
+                <a:solidFill>
+                  <a:srgbClr val="2B3541"/>
+                </a:solidFill>
+                <a:latin typeface="Funnel Sans" pitchFamily="34" charset="0"/>
+                <a:ea typeface="Funnel Sans" pitchFamily="34" charset="-122"/>
+                <a:cs typeface="Funnel Sans" pitchFamily="34" charset="-120"/>
+              </a:rPr>
+              <a:t>Real-camera classification accuracy and latency remain unmeasured.</a:t>
+            </a:r>
+            <a:endParaRPr lang="en-US" sz="1400" dirty="0"/>
+          </a:p>
+        </p:txBody>
+      </p:sp>
+    </p:spTree>
+  </p:cSld>
+  <p:clrMapOvr>
+    <a:masterClrMapping/>
+  </p:clrMapOvr>
+</p:sld>
+</file>
+
+<file path=ppt/slides/slide11.xml><?xml version="1.0" encoding="utf-8"?>
+<p:sld xmlns:a="http://schemas.openxmlformats.org/drawingml/2006/main" xmlns:r="http://schemas.openxmlformats.org/officeDocument/2006/relationships" xmlns:p="http://schemas.openxmlformats.org/presentationml/2006/main">
+  <p:cSld>
+    <p:bg>
+      <p:bgPr>
+        <a:solidFill>
+          <a:srgbClr val="FAF5EB"/>
+        </a:solidFill>
+        <a:effectLst/>
+      </p:bgPr>
+    </p:bg>
+    <p:spTree>
+      <p:nvGrpSpPr>
+        <p:cNvPr id="1" name=""/>
+        <p:cNvGrpSpPr/>
+        <p:nvPr/>
+      </p:nvGrpSpPr>
+      <p:grpSpPr>
+        <a:xfrm>
+          <a:off x="0" y="0"/>
+          <a:ext cx="0" cy="0"/>
+          <a:chOff x="0" y="0"/>
+          <a:chExt cx="0" cy="0"/>
+        </a:xfrm>
+      </p:grpSpPr>
+      <p:sp>
+        <p:nvSpPr>
+          <p:cNvPr id="2" name="Text 0"/>
+          <p:cNvSpPr/>
+          <p:nvPr/>
+        </p:nvSpPr>
+        <p:spPr>
+          <a:xfrm>
+            <a:off x="609585" y="431800"/>
+            <a:ext cx="11582110" cy="190500"/>
           </a:xfrm>
           <a:prstGeom prst="rect">
             <a:avLst/>
@@ -2544,35 +2916,193 @@
           <a:p>
             <a:pPr marL="0" indent="0" algn="l">
               <a:lnSpc>
-                <a:spcPct val="83000"/>
-              </a:lnSpc>
-              <a:buNone/>
-            </a:pPr>
-            <a:r>
-              <a:rPr lang="en-US" sz="1650" dirty="0">
-                <a:solidFill>
-                  <a:srgbClr val="B8367F"/>
+                <a:spcPct val="104000"/>
+              </a:lnSpc>
+              <a:buNone/>
+            </a:pPr>
+            <a:r>
+              <a:rPr lang="en-US" sz="1200" kern="100" spc="96" dirty="0">
+                <a:solidFill>
+                  <a:srgbClr val="8A3FA8"/>
                 </a:solidFill>
                 <a:latin typeface="Funnel Sans SemiBold" pitchFamily="34" charset="0"/>
                 <a:ea typeface="Funnel Sans SemiBold" pitchFamily="34" charset="-122"/>
                 <a:cs typeface="Funnel Sans SemiBold" pitchFamily="34" charset="-120"/>
               </a:rPr>
-              <a:t>1</a:t>
-            </a:r>
-            <a:endParaRPr lang="en-US" sz="1650" dirty="0"/>
-          </a:p>
-        </p:txBody>
-      </p:sp>
-      <p:sp>
-        <p:nvSpPr>
-          <p:cNvPr id="14" name="Text 12"/>
-          <p:cNvSpPr/>
-          <p:nvPr/>
-        </p:nvSpPr>
-        <p:spPr>
-          <a:xfrm>
-            <a:off x="5515035" y="1710134"/>
-            <a:ext cx="6067075" cy="293291"/>
+              <a:t>PROJECT ROADMAP</a:t>
+            </a:r>
+            <a:endParaRPr lang="en-US" sz="1200" dirty="0"/>
+          </a:p>
+        </p:txBody>
+      </p:sp>
+      <p:sp>
+        <p:nvSpPr>
+          <p:cNvPr id="3" name="Text 1"/>
+          <p:cNvSpPr/>
+          <p:nvPr/>
+        </p:nvSpPr>
+        <p:spPr>
+          <a:xfrm>
+            <a:off x="609585" y="708025"/>
+            <a:ext cx="10972526" cy="484584"/>
+          </a:xfrm>
+          <a:prstGeom prst="rect">
+            <a:avLst/>
+          </a:prstGeom>
+          <a:noFill/>
+        </p:spPr>
+        <p:txBody>
+          <a:bodyPr wrap="none" lIns="0" tIns="0" rIns="0" bIns="0" rtlCol="0" anchor="t"/>
+          <a:lstStyle/>
+          <a:p>
+            <a:pPr marL="0" indent="0" algn="l">
+              <a:lnSpc>
+                <a:spcPct val="88000"/>
+              </a:lnSpc>
+              <a:buNone/>
+            </a:pPr>
+            <a:r>
+              <a:rPr lang="en-US" sz="3600" kern="100" spc="-36" dirty="0">
+                <a:solidFill>
+                  <a:srgbClr val="051D3A"/>
+                </a:solidFill>
+                <a:latin typeface="Funnel Display Medium" pitchFamily="34" charset="0"/>
+                <a:ea typeface="Funnel Display Medium" pitchFamily="34" charset="-122"/>
+                <a:cs typeface="Funnel Display Medium" pitchFamily="34" charset="-120"/>
+              </a:rPr>
+              <a:t>Course anchors and technical steps</a:t>
+            </a:r>
+            <a:endParaRPr lang="en-US" sz="3600" dirty="0"/>
+          </a:p>
+        </p:txBody>
+      </p:sp>
+      <p:sp>
+        <p:nvSpPr>
+          <p:cNvPr id="4" name="Text 2"/>
+          <p:cNvSpPr/>
+          <p:nvPr/>
+        </p:nvSpPr>
+        <p:spPr>
+          <a:xfrm>
+            <a:off x="609585" y="1398984"/>
+            <a:ext cx="4206075" cy="190500"/>
+          </a:xfrm>
+          <a:prstGeom prst="rect">
+            <a:avLst/>
+          </a:prstGeom>
+          <a:noFill/>
+        </p:spPr>
+        <p:txBody>
+          <a:bodyPr wrap="none" lIns="0" tIns="0" rIns="0" bIns="0" rtlCol="0" anchor="t"/>
+          <a:lstStyle/>
+          <a:p>
+            <a:pPr marL="0" indent="0" algn="l">
+              <a:lnSpc>
+                <a:spcPct val="104000"/>
+              </a:lnSpc>
+              <a:buNone/>
+            </a:pPr>
+            <a:r>
+              <a:rPr lang="en-US" sz="1200" kern="100" spc="96" dirty="0">
+                <a:solidFill>
+                  <a:srgbClr val="8A3FA8"/>
+                </a:solidFill>
+                <a:latin typeface="Funnel Sans SemiBold" pitchFamily="34" charset="0"/>
+                <a:ea typeface="Funnel Sans SemiBold" pitchFamily="34" charset="-122"/>
+                <a:cs typeface="Funnel Sans SemiBold" pitchFamily="34" charset="-120"/>
+              </a:rPr>
+              <a:t>COURSE ANCHORS</a:t>
+            </a:r>
+            <a:endParaRPr lang="en-US" sz="1200" dirty="0"/>
+          </a:p>
+        </p:txBody>
+      </p:sp>
+      <p:sp>
+        <p:nvSpPr>
+          <p:cNvPr id="5" name="Shape 3"/>
+          <p:cNvSpPr/>
+          <p:nvPr/>
+        </p:nvSpPr>
+        <p:spPr>
+          <a:xfrm>
+            <a:off x="609585" y="1710134"/>
+            <a:ext cx="4206075" cy="2954238"/>
+          </a:xfrm>
+          <a:prstGeom prst="roundRect">
+            <a:avLst>
+              <a:gd name="adj" fmla="val 2979"/>
+            </a:avLst>
+          </a:prstGeom>
+          <a:solidFill>
+            <a:srgbClr val="FFFCF6"/>
+          </a:solidFill>
+          <a:effectLst>
+            <a:outerShdw blurRad="379730" dist="151130" dir="5400000" algn="bl" rotWithShape="0">
+              <a:srgbClr val="6A4FC8">
+                <a:alpha val="40000"/>
+              </a:srgbClr>
+            </a:outerShdw>
+          </a:effectLst>
+        </p:spPr>
+        <p:txBody>
+          <a:bodyPr/>
+          <a:lstStyle/>
+          <a:p>
+            <a:endParaRPr lang="zh-CN" altLang="en-US"/>
+          </a:p>
+        </p:txBody>
+      </p:sp>
+      <p:sp>
+        <p:nvSpPr>
+          <p:cNvPr id="6" name="Text 4"/>
+          <p:cNvSpPr/>
+          <p:nvPr/>
+        </p:nvSpPr>
+        <p:spPr>
+          <a:xfrm>
+            <a:off x="863578" y="1913334"/>
+            <a:ext cx="3698088" cy="281880"/>
+          </a:xfrm>
+          <a:prstGeom prst="rect">
+            <a:avLst/>
+          </a:prstGeom>
+          <a:noFill/>
+        </p:spPr>
+        <p:txBody>
+          <a:bodyPr wrap="none" lIns="0" tIns="0" rIns="0" bIns="0" rtlCol="0" anchor="t"/>
+          <a:lstStyle/>
+          <a:p>
+            <a:pPr marL="0" indent="0" algn="l">
+              <a:lnSpc>
+                <a:spcPct val="100000"/>
+              </a:lnSpc>
+              <a:buNone/>
+            </a:pPr>
+            <a:r>
+              <a:rPr lang="en-US" sz="1850" kern="100" spc="-9" dirty="0">
+                <a:solidFill>
+                  <a:srgbClr val="2B3541"/>
+                </a:solidFill>
+                <a:latin typeface="Funnel Sans SemiBold" pitchFamily="34" charset="0"/>
+                <a:ea typeface="Funnel Sans SemiBold" pitchFamily="34" charset="-122"/>
+                <a:cs typeface="Funnel Sans SemiBold" pitchFamily="34" charset="-120"/>
+              </a:rPr>
+              <a:t>30 Sep 2026</a:t>
+            </a:r>
+            <a:endParaRPr lang="en-US" sz="1850" dirty="0"/>
+          </a:p>
+        </p:txBody>
+      </p:sp>
+      <p:sp>
+        <p:nvSpPr>
+          <p:cNvPr id="7" name="Text 5"/>
+          <p:cNvSpPr/>
+          <p:nvPr/>
+        </p:nvSpPr>
+        <p:spPr>
+          <a:xfrm>
+            <a:off x="863578" y="2344440"/>
+            <a:ext cx="3952082" cy="293291"/>
           </a:xfrm>
           <a:prstGeom prst="rect">
             <a:avLst/>
@@ -2598,7 +3128,7 @@
                 <a:ea typeface="Funnel Sans" pitchFamily="34" charset="-122"/>
                 <a:cs typeface="Funnel Sans" pitchFamily="34" charset="-120"/>
               </a:rPr>
-              <a:t>Fix data and spot-check labels by hand</a:t>
+              <a:t>Proposal submitted · done</a:t>
             </a:r>
             <a:endParaRPr lang="en-US" sz="1650" dirty="0"/>
           </a:p>
@@ -2606,14 +3136,14 @@
       </p:sp>
       <p:sp>
         <p:nvSpPr>
-          <p:cNvPr id="15" name="Text 13"/>
-          <p:cNvSpPr/>
-          <p:nvPr/>
-        </p:nvSpPr>
-        <p:spPr>
-          <a:xfrm>
-            <a:off x="5272749" y="2197695"/>
-            <a:ext cx="724874" cy="209550"/>
+          <p:cNvPr id="8" name="Text 6"/>
+          <p:cNvSpPr/>
+          <p:nvPr/>
+        </p:nvSpPr>
+        <p:spPr>
+          <a:xfrm>
+            <a:off x="863578" y="2825055"/>
+            <a:ext cx="3698088" cy="281880"/>
           </a:xfrm>
           <a:prstGeom prst="rect">
             <a:avLst/>
@@ -2626,35 +3156,35 @@
           <a:p>
             <a:pPr marL="0" indent="0" algn="l">
               <a:lnSpc>
-                <a:spcPct val="83000"/>
-              </a:lnSpc>
-              <a:buNone/>
-            </a:pPr>
-            <a:r>
-              <a:rPr lang="en-US" sz="1650" dirty="0">
-                <a:solidFill>
-                  <a:srgbClr val="B8367F"/>
+                <a:spcPct val="100000"/>
+              </a:lnSpc>
+              <a:buNone/>
+            </a:pPr>
+            <a:r>
+              <a:rPr lang="en-US" sz="1850" kern="100" spc="-9" dirty="0">
+                <a:solidFill>
+                  <a:srgbClr val="2B3541"/>
                 </a:solidFill>
                 <a:latin typeface="Funnel Sans SemiBold" pitchFamily="34" charset="0"/>
                 <a:ea typeface="Funnel Sans SemiBold" pitchFamily="34" charset="-122"/>
                 <a:cs typeface="Funnel Sans SemiBold" pitchFamily="34" charset="-120"/>
               </a:rPr>
-              <a:t>2</a:t>
-            </a:r>
-            <a:endParaRPr lang="en-US" sz="1650" dirty="0"/>
-          </a:p>
-        </p:txBody>
-      </p:sp>
-      <p:sp>
-        <p:nvSpPr>
-          <p:cNvPr id="16" name="Text 14"/>
-          <p:cNvSpPr/>
-          <p:nvPr/>
-        </p:nvSpPr>
-        <p:spPr>
-          <a:xfrm>
-            <a:off x="5515035" y="2155825"/>
-            <a:ext cx="6067075" cy="293291"/>
+              <a:t>6 Oct 2026</a:t>
+            </a:r>
+            <a:endParaRPr lang="en-US" sz="1850" dirty="0"/>
+          </a:p>
+        </p:txBody>
+      </p:sp>
+      <p:sp>
+        <p:nvSpPr>
+          <p:cNvPr id="9" name="Text 7"/>
+          <p:cNvSpPr/>
+          <p:nvPr/>
+        </p:nvSpPr>
+        <p:spPr>
+          <a:xfrm>
+            <a:off x="863578" y="3256161"/>
+            <a:ext cx="3952082" cy="293291"/>
           </a:xfrm>
           <a:prstGeom prst="rect">
             <a:avLst/>
@@ -2680,7 +3210,7 @@
                 <a:ea typeface="Funnel Sans" pitchFamily="34" charset="-122"/>
                 <a:cs typeface="Funnel Sans" pitchFamily="34" charset="-120"/>
               </a:rPr>
-              <a:t>Freeze splits and manifest</a:t>
+              <a:t>First presentation · today</a:t>
             </a:r>
             <a:endParaRPr lang="en-US" sz="1650" dirty="0"/>
           </a:p>
@@ -2688,14 +3218,14 @@
       </p:sp>
       <p:sp>
         <p:nvSpPr>
-          <p:cNvPr id="17" name="Text 15"/>
-          <p:cNvSpPr/>
-          <p:nvPr/>
-        </p:nvSpPr>
-        <p:spPr>
-          <a:xfrm>
-            <a:off x="5272749" y="2643386"/>
-            <a:ext cx="724874" cy="209550"/>
+          <p:cNvPr id="10" name="Text 8"/>
+          <p:cNvSpPr/>
+          <p:nvPr/>
+        </p:nvSpPr>
+        <p:spPr>
+          <a:xfrm>
+            <a:off x="863578" y="3736777"/>
+            <a:ext cx="3698088" cy="281880"/>
           </a:xfrm>
           <a:prstGeom prst="rect">
             <a:avLst/>
@@ -2708,35 +3238,35 @@
           <a:p>
             <a:pPr marL="0" indent="0" algn="l">
               <a:lnSpc>
-                <a:spcPct val="83000"/>
-              </a:lnSpc>
-              <a:buNone/>
-            </a:pPr>
-            <a:r>
-              <a:rPr lang="en-US" sz="1650" dirty="0">
-                <a:solidFill>
-                  <a:srgbClr val="B8367F"/>
+                <a:spcPct val="100000"/>
+              </a:lnSpc>
+              <a:buNone/>
+            </a:pPr>
+            <a:r>
+              <a:rPr lang="en-US" sz="1850" kern="100" spc="-9" dirty="0">
+                <a:solidFill>
+                  <a:srgbClr val="2B3541"/>
                 </a:solidFill>
                 <a:latin typeface="Funnel Sans SemiBold" pitchFamily="34" charset="0"/>
                 <a:ea typeface="Funnel Sans SemiBold" pitchFamily="34" charset="-122"/>
                 <a:cs typeface="Funnel Sans SemiBold" pitchFamily="34" charset="-120"/>
               </a:rPr>
-              <a:t>3</a:t>
-            </a:r>
-            <a:endParaRPr lang="en-US" sz="1650" dirty="0"/>
-          </a:p>
-        </p:txBody>
-      </p:sp>
-      <p:sp>
-        <p:nvSpPr>
-          <p:cNvPr id="18" name="Text 16"/>
-          <p:cNvSpPr/>
-          <p:nvPr/>
-        </p:nvSpPr>
-        <p:spPr>
-          <a:xfrm>
-            <a:off x="5515035" y="2601516"/>
-            <a:ext cx="6067075" cy="293291"/>
+              <a:t>31 Oct 2026</a:t>
+            </a:r>
+            <a:endParaRPr lang="en-US" sz="1850" dirty="0"/>
+          </a:p>
+        </p:txBody>
+      </p:sp>
+      <p:sp>
+        <p:nvSpPr>
+          <p:cNvPr id="11" name="Text 9"/>
+          <p:cNvSpPr/>
+          <p:nvPr/>
+        </p:nvSpPr>
+        <p:spPr>
+          <a:xfrm>
+            <a:off x="863578" y="4167882"/>
+            <a:ext cx="3952082" cy="293291"/>
           </a:xfrm>
           <a:prstGeom prst="rect">
             <a:avLst/>
@@ -2762,7 +3292,294 @@
                 <a:ea typeface="Funnel Sans" pitchFamily="34" charset="-122"/>
                 <a:cs typeface="Funnel Sans" pitchFamily="34" charset="-120"/>
               </a:rPr>
-              <a:t>Cloud YOLO training · pending clean data</a:t>
+              <a:t>All deliverables due</a:t>
+            </a:r>
+            <a:endParaRPr lang="en-US" sz="1650" dirty="0"/>
+          </a:p>
+        </p:txBody>
+      </p:sp>
+      <p:sp>
+        <p:nvSpPr>
+          <p:cNvPr id="12" name="Text 10"/>
+          <p:cNvSpPr/>
+          <p:nvPr/>
+        </p:nvSpPr>
+        <p:spPr>
+          <a:xfrm>
+            <a:off x="5272749" y="1398984"/>
+            <a:ext cx="6309361" cy="190500"/>
+          </a:xfrm>
+          <a:prstGeom prst="rect">
+            <a:avLst/>
+          </a:prstGeom>
+          <a:noFill/>
+        </p:spPr>
+        <p:txBody>
+          <a:bodyPr wrap="none" lIns="0" tIns="0" rIns="0" bIns="0" rtlCol="0" anchor="t"/>
+          <a:lstStyle/>
+          <a:p>
+            <a:pPr marL="0" indent="0" algn="l">
+              <a:lnSpc>
+                <a:spcPct val="104000"/>
+              </a:lnSpc>
+              <a:buNone/>
+            </a:pPr>
+            <a:r>
+              <a:rPr lang="en-US" sz="1200" kern="100" spc="96" dirty="0">
+                <a:solidFill>
+                  <a:srgbClr val="8A3FA8"/>
+                </a:solidFill>
+                <a:latin typeface="Funnel Sans SemiBold" pitchFamily="34" charset="0"/>
+                <a:ea typeface="Funnel Sans SemiBold" pitchFamily="34" charset="-122"/>
+                <a:cs typeface="Funnel Sans SemiBold" pitchFamily="34" charset="-120"/>
+              </a:rPr>
+              <a:t>TECHNICAL STEPS</a:t>
+            </a:r>
+            <a:endParaRPr lang="en-US" sz="1200" dirty="0"/>
+          </a:p>
+        </p:txBody>
+      </p:sp>
+      <p:sp>
+        <p:nvSpPr>
+          <p:cNvPr id="13" name="Text 11"/>
+          <p:cNvSpPr/>
+          <p:nvPr/>
+        </p:nvSpPr>
+        <p:spPr>
+          <a:xfrm>
+            <a:off x="5272749" y="1752005"/>
+            <a:ext cx="724874" cy="209550"/>
+          </a:xfrm>
+          <a:prstGeom prst="rect">
+            <a:avLst/>
+          </a:prstGeom>
+          <a:noFill/>
+        </p:spPr>
+        <p:txBody>
+          <a:bodyPr wrap="none" lIns="0" tIns="0" rIns="0" bIns="0" rtlCol="0" anchor="t"/>
+          <a:lstStyle/>
+          <a:p>
+            <a:pPr marL="0" indent="0" algn="l">
+              <a:lnSpc>
+                <a:spcPct val="83000"/>
+              </a:lnSpc>
+              <a:buNone/>
+            </a:pPr>
+            <a:r>
+              <a:rPr lang="en-US" sz="1650" dirty="0">
+                <a:solidFill>
+                  <a:srgbClr val="B8367F"/>
+                </a:solidFill>
+                <a:latin typeface="Funnel Sans SemiBold" pitchFamily="34" charset="0"/>
+                <a:ea typeface="Funnel Sans SemiBold" pitchFamily="34" charset="-122"/>
+                <a:cs typeface="Funnel Sans SemiBold" pitchFamily="34" charset="-120"/>
+              </a:rPr>
+              <a:t>1</a:t>
+            </a:r>
+            <a:endParaRPr lang="en-US" sz="1650" dirty="0"/>
+          </a:p>
+        </p:txBody>
+      </p:sp>
+      <p:sp>
+        <p:nvSpPr>
+          <p:cNvPr id="14" name="Text 12"/>
+          <p:cNvSpPr/>
+          <p:nvPr/>
+        </p:nvSpPr>
+        <p:spPr>
+          <a:xfrm>
+            <a:off x="5515035" y="1710134"/>
+            <a:ext cx="6067075" cy="293291"/>
+          </a:xfrm>
+          <a:prstGeom prst="rect">
+            <a:avLst/>
+          </a:prstGeom>
+          <a:noFill/>
+        </p:spPr>
+        <p:txBody>
+          <a:bodyPr wrap="none" lIns="0" tIns="0" rIns="0" bIns="0" rtlCol="0" anchor="t"/>
+          <a:lstStyle/>
+          <a:p>
+            <a:pPr marL="0" indent="0" algn="l">
+              <a:lnSpc>
+                <a:spcPct val="117000"/>
+              </a:lnSpc>
+              <a:buNone/>
+            </a:pPr>
+            <a:r>
+              <a:rPr lang="en-US" sz="1650" dirty="0">
+                <a:solidFill>
+                  <a:srgbClr val="2B3541"/>
+                </a:solidFill>
+                <a:latin typeface="Funnel Sans" pitchFamily="34" charset="0"/>
+                <a:ea typeface="Funnel Sans" pitchFamily="34" charset="-122"/>
+                <a:cs typeface="Funnel Sans" pitchFamily="34" charset="-120"/>
+              </a:rPr>
+              <a:t>Fix data and spot-check labels by hand</a:t>
+            </a:r>
+            <a:endParaRPr lang="en-US" sz="1650" dirty="0"/>
+          </a:p>
+        </p:txBody>
+      </p:sp>
+      <p:sp>
+        <p:nvSpPr>
+          <p:cNvPr id="15" name="Text 13"/>
+          <p:cNvSpPr/>
+          <p:nvPr/>
+        </p:nvSpPr>
+        <p:spPr>
+          <a:xfrm>
+            <a:off x="5272749" y="2197695"/>
+            <a:ext cx="724874" cy="209550"/>
+          </a:xfrm>
+          <a:prstGeom prst="rect">
+            <a:avLst/>
+          </a:prstGeom>
+          <a:noFill/>
+        </p:spPr>
+        <p:txBody>
+          <a:bodyPr wrap="none" lIns="0" tIns="0" rIns="0" bIns="0" rtlCol="0" anchor="t"/>
+          <a:lstStyle/>
+          <a:p>
+            <a:pPr marL="0" indent="0" algn="l">
+              <a:lnSpc>
+                <a:spcPct val="83000"/>
+              </a:lnSpc>
+              <a:buNone/>
+            </a:pPr>
+            <a:r>
+              <a:rPr lang="en-US" sz="1650" dirty="0">
+                <a:solidFill>
+                  <a:srgbClr val="B8367F"/>
+                </a:solidFill>
+                <a:latin typeface="Funnel Sans SemiBold" pitchFamily="34" charset="0"/>
+                <a:ea typeface="Funnel Sans SemiBold" pitchFamily="34" charset="-122"/>
+                <a:cs typeface="Funnel Sans SemiBold" pitchFamily="34" charset="-120"/>
+              </a:rPr>
+              <a:t>2</a:t>
+            </a:r>
+            <a:endParaRPr lang="en-US" sz="1650" dirty="0"/>
+          </a:p>
+        </p:txBody>
+      </p:sp>
+      <p:sp>
+        <p:nvSpPr>
+          <p:cNvPr id="16" name="Text 14"/>
+          <p:cNvSpPr/>
+          <p:nvPr/>
+        </p:nvSpPr>
+        <p:spPr>
+          <a:xfrm>
+            <a:off x="5515035" y="2155825"/>
+            <a:ext cx="6067075" cy="293291"/>
+          </a:xfrm>
+          <a:prstGeom prst="rect">
+            <a:avLst/>
+          </a:prstGeom>
+          <a:noFill/>
+        </p:spPr>
+        <p:txBody>
+          <a:bodyPr wrap="none" lIns="0" tIns="0" rIns="0" bIns="0" rtlCol="0" anchor="t"/>
+          <a:lstStyle/>
+          <a:p>
+            <a:pPr marL="0" indent="0" algn="l">
+              <a:lnSpc>
+                <a:spcPct val="117000"/>
+              </a:lnSpc>
+              <a:buNone/>
+            </a:pPr>
+            <a:r>
+              <a:rPr lang="en-US" sz="1650" dirty="0">
+                <a:solidFill>
+                  <a:srgbClr val="2B3541"/>
+                </a:solidFill>
+                <a:latin typeface="Funnel Sans" pitchFamily="34" charset="0"/>
+                <a:ea typeface="Funnel Sans" pitchFamily="34" charset="-122"/>
+                <a:cs typeface="Funnel Sans" pitchFamily="34" charset="-120"/>
+              </a:rPr>
+              <a:t>Freeze splits and manifest</a:t>
+            </a:r>
+            <a:endParaRPr lang="en-US" sz="1650" dirty="0"/>
+          </a:p>
+        </p:txBody>
+      </p:sp>
+      <p:sp>
+        <p:nvSpPr>
+          <p:cNvPr id="17" name="Text 15"/>
+          <p:cNvSpPr/>
+          <p:nvPr/>
+        </p:nvSpPr>
+        <p:spPr>
+          <a:xfrm>
+            <a:off x="5272749" y="2643386"/>
+            <a:ext cx="724874" cy="209550"/>
+          </a:xfrm>
+          <a:prstGeom prst="rect">
+            <a:avLst/>
+          </a:prstGeom>
+          <a:noFill/>
+        </p:spPr>
+        <p:txBody>
+          <a:bodyPr wrap="none" lIns="0" tIns="0" rIns="0" bIns="0" rtlCol="0" anchor="t"/>
+          <a:lstStyle/>
+          <a:p>
+            <a:pPr marL="0" indent="0" algn="l">
+              <a:lnSpc>
+                <a:spcPct val="83000"/>
+              </a:lnSpc>
+              <a:buNone/>
+            </a:pPr>
+            <a:r>
+              <a:rPr lang="en-US" sz="1650" dirty="0">
+                <a:solidFill>
+                  <a:srgbClr val="B8367F"/>
+                </a:solidFill>
+                <a:latin typeface="Funnel Sans SemiBold" pitchFamily="34" charset="0"/>
+                <a:ea typeface="Funnel Sans SemiBold" pitchFamily="34" charset="-122"/>
+                <a:cs typeface="Funnel Sans SemiBold" pitchFamily="34" charset="-120"/>
+              </a:rPr>
+              <a:t>3</a:t>
+            </a:r>
+            <a:endParaRPr lang="en-US" sz="1650" dirty="0"/>
+          </a:p>
+        </p:txBody>
+      </p:sp>
+      <p:sp>
+        <p:nvSpPr>
+          <p:cNvPr id="18" name="Text 16"/>
+          <p:cNvSpPr/>
+          <p:nvPr/>
+        </p:nvSpPr>
+        <p:spPr>
+          <a:xfrm>
+            <a:off x="5515035" y="2601516"/>
+            <a:ext cx="6067075" cy="293291"/>
+          </a:xfrm>
+          <a:prstGeom prst="rect">
+            <a:avLst/>
+          </a:prstGeom>
+          <a:noFill/>
+        </p:spPr>
+        <p:txBody>
+          <a:bodyPr wrap="none" lIns="0" tIns="0" rIns="0" bIns="0" rtlCol="0" anchor="t"/>
+          <a:lstStyle/>
+          <a:p>
+            <a:pPr marL="0" indent="0" algn="l">
+              <a:lnSpc>
+                <a:spcPct val="117000"/>
+              </a:lnSpc>
+              <a:buNone/>
+            </a:pPr>
+            <a:r>
+              <a:rPr lang="en-US" sz="1650" dirty="0">
+                <a:solidFill>
+                  <a:srgbClr val="2B3541"/>
+                </a:solidFill>
+                <a:latin typeface="Funnel Sans" pitchFamily="34" charset="0"/>
+                <a:ea typeface="Funnel Sans" pitchFamily="34" charset="-122"/>
+                <a:cs typeface="Funnel Sans" pitchFamily="34" charset="-120"/>
+              </a:rPr>
+              <a:t>Formal cloud training · first model exists</a:t>
             </a:r>
             <a:endParaRPr lang="en-US" sz="1650" dirty="0"/>
           </a:p>
@@ -3303,6 +4120,13 @@
             </a:outerShdw>
           </a:effectLst>
         </p:spPr>
+        <p:txBody>
+          <a:bodyPr/>
+          <a:lstStyle/>
+          <a:p>
+            <a:endParaRPr lang="zh-CN" altLang="en-US"/>
+          </a:p>
+        </p:txBody>
       </p:sp>
       <p:sp>
         <p:nvSpPr>
@@ -3314,6 +4138,49 @@
           <a:xfrm>
             <a:off x="939776" y="3117453"/>
             <a:ext cx="5689458" cy="1005780"/>
+          </a:xfrm>
+          <a:prstGeom prst="rect">
+            <a:avLst/>
+          </a:prstGeom>
+          <a:noFill/>
+        </p:spPr>
+        <p:txBody>
+          <a:bodyPr wrap="square" lIns="0" tIns="0" rIns="0" bIns="0" rtlCol="0" anchor="t">
+            <a:normAutofit lnSpcReduction="10000"/>
+          </a:bodyPr>
+          <a:lstStyle/>
+          <a:p>
+            <a:pPr marL="0" indent="0" algn="l">
+              <a:lnSpc>
+                <a:spcPct val="100000"/>
+              </a:lnSpc>
+              <a:buNone/>
+            </a:pPr>
+            <a:r>
+              <a:rPr lang="en-US" sz="2200" kern="100" spc="-11" dirty="0">
+                <a:solidFill>
+                  <a:srgbClr val="2B3541"/>
+                </a:solidFill>
+                <a:latin typeface="Funnel Sans SemiBold" pitchFamily="34" charset="0"/>
+                <a:ea typeface="Funnel Sans SemiBold" pitchFamily="34" charset="-122"/>
+                <a:cs typeface="Funnel Sans SemiBold" pitchFamily="34" charset="-120"/>
+              </a:rPr>
+              <a:t>A useful review needs to show which actions happened, when they happened, and which steps were not detected.</a:t>
+            </a:r>
+            <a:endParaRPr lang="en-US" sz="2200" dirty="0"/>
+          </a:p>
+        </p:txBody>
+      </p:sp>
+      <p:sp>
+        <p:nvSpPr>
+          <p:cNvPr id="6" name="Text 4"/>
+          <p:cNvSpPr/>
+          <p:nvPr/>
+        </p:nvSpPr>
+        <p:spPr>
+          <a:xfrm>
+            <a:off x="609585" y="4615359"/>
+            <a:ext cx="6349841" cy="675481"/>
           </a:xfrm>
           <a:prstGeom prst="rect">
             <a:avLst/>
@@ -3328,103 +4195,60 @@
           <a:p>
             <a:pPr marL="0" indent="0" algn="l">
               <a:lnSpc>
-                <a:spcPct val="100000"/>
-              </a:lnSpc>
-              <a:buNone/>
-            </a:pPr>
-            <a:r>
-              <a:rPr lang="en-US" sz="2200" kern="100" spc="-11" dirty="0">
+                <a:spcPct val="117000"/>
+              </a:lnSpc>
+              <a:buNone/>
+            </a:pPr>
+            <a:r>
+              <a:rPr lang="en-US" sz="1900" dirty="0">
                 <a:solidFill>
                   <a:srgbClr val="2B3541"/>
+                </a:solidFill>
+                <a:latin typeface="Funnel Sans" pitchFamily="34" charset="0"/>
+                <a:ea typeface="Funnel Sans" pitchFamily="34" charset="-122"/>
+                <a:cs typeface="Funnel Sans" pitchFamily="34" charset="-120"/>
+              </a:rPr>
+              <a:t>We propose a video-based tool that turns these observations into feedback a user can check.</a:t>
+            </a:r>
+            <a:endParaRPr lang="en-US" sz="1900" dirty="0"/>
+          </a:p>
+        </p:txBody>
+      </p:sp>
+      <p:sp>
+        <p:nvSpPr>
+          <p:cNvPr id="7" name="Text 5"/>
+          <p:cNvSpPr/>
+          <p:nvPr/>
+        </p:nvSpPr>
+        <p:spPr>
+          <a:xfrm>
+            <a:off x="7619809" y="1363067"/>
+            <a:ext cx="4571886" cy="190500"/>
+          </a:xfrm>
+          <a:prstGeom prst="rect">
+            <a:avLst/>
+          </a:prstGeom>
+          <a:noFill/>
+        </p:spPr>
+        <p:txBody>
+          <a:bodyPr wrap="none" lIns="0" tIns="0" rIns="0" bIns="0" rtlCol="0" anchor="t"/>
+          <a:lstStyle/>
+          <a:p>
+            <a:pPr marL="0" indent="0" algn="l">
+              <a:lnSpc>
+                <a:spcPct val="104000"/>
+              </a:lnSpc>
+              <a:buNone/>
+            </a:pPr>
+            <a:r>
+              <a:rPr lang="en-US" sz="1200" kern="100" spc="96" dirty="0">
+                <a:solidFill>
+                  <a:srgbClr val="8A3FA8"/>
                 </a:solidFill>
                 <a:latin typeface="Funnel Sans SemiBold" pitchFamily="34" charset="0"/>
                 <a:ea typeface="Funnel Sans SemiBold" pitchFamily="34" charset="-122"/>
                 <a:cs typeface="Funnel Sans SemiBold" pitchFamily="34" charset="-120"/>
               </a:rPr>
-              <a:t>A useful review needs to show which actions happened, when they happened, and which steps were not detected.</a:t>
-            </a:r>
-            <a:endParaRPr lang="en-US" sz="2200" dirty="0"/>
-          </a:p>
-        </p:txBody>
-      </p:sp>
-      <p:sp>
-        <p:nvSpPr>
-          <p:cNvPr id="6" name="Text 4"/>
-          <p:cNvSpPr/>
-          <p:nvPr/>
-        </p:nvSpPr>
-        <p:spPr>
-          <a:xfrm>
-            <a:off x="609585" y="4615359"/>
-            <a:ext cx="6349841" cy="675481"/>
-          </a:xfrm>
-          <a:prstGeom prst="rect">
-            <a:avLst/>
-          </a:prstGeom>
-          <a:noFill/>
-        </p:spPr>
-        <p:txBody>
-          <a:bodyPr wrap="square" lIns="0" tIns="0" rIns="0" bIns="0" rtlCol="0" anchor="t">
-            <a:normAutofit/>
-          </a:bodyPr>
-          <a:lstStyle/>
-          <a:p>
-            <a:pPr marL="0" indent="0" algn="l">
-              <a:lnSpc>
-                <a:spcPct val="117000"/>
-              </a:lnSpc>
-              <a:buNone/>
-            </a:pPr>
-            <a:r>
-              <a:rPr lang="en-US" sz="1900" dirty="0">
-                <a:solidFill>
-                  <a:srgbClr val="2B3541"/>
-                </a:solidFill>
-                <a:latin typeface="Funnel Sans" pitchFamily="34" charset="0"/>
-                <a:ea typeface="Funnel Sans" pitchFamily="34" charset="-122"/>
-                <a:cs typeface="Funnel Sans" pitchFamily="34" charset="-120"/>
-              </a:rPr>
-              <a:t>We propose a video-based tool that turns these observations into feedback a user can check.</a:t>
-            </a:r>
-            <a:endParaRPr lang="en-US" sz="1900" dirty="0"/>
-          </a:p>
-        </p:txBody>
-      </p:sp>
-      <p:sp>
-        <p:nvSpPr>
-          <p:cNvPr id="7" name="Text 5"/>
-          <p:cNvSpPr/>
-          <p:nvPr/>
-        </p:nvSpPr>
-        <p:spPr>
-          <a:xfrm>
-            <a:off x="7619809" y="1363067"/>
-            <a:ext cx="4571886" cy="190500"/>
-          </a:xfrm>
-          <a:prstGeom prst="rect">
-            <a:avLst/>
-          </a:prstGeom>
-          <a:noFill/>
-        </p:spPr>
-        <p:txBody>
-          <a:bodyPr wrap="none" lIns="0" tIns="0" rIns="0" bIns="0" rtlCol="0" anchor="t"/>
-          <a:lstStyle/>
-          <a:p>
-            <a:pPr marL="0" indent="0" algn="l">
-              <a:lnSpc>
-                <a:spcPct val="104000"/>
-              </a:lnSpc>
-              <a:buNone/>
-            </a:pPr>
-            <a:r>
-              <a:rPr lang="en-US" sz="1200" kern="100" spc="96" dirty="0">
-                <a:solidFill>
-                  <a:srgbClr val="8A3FA8"/>
-                </a:solidFill>
-                <a:latin typeface="Funnel Sans SemiBold" pitchFamily="34" charset="0"/>
-                <a:ea typeface="Funnel Sans SemiBold" pitchFamily="34" charset="-122"/>
-                <a:cs typeface="Funnel Sans SemiBold" pitchFamily="34" charset="-120"/>
-              </a:rPr>
               <a:t>THE CHALLENGE</a:t>
             </a:r>
             <a:endParaRPr lang="en-US" sz="1200" dirty="0"/>
@@ -3449,7 +4273,7 @@
         </p:spPr>
         <p:txBody>
           <a:bodyPr wrap="square" lIns="0" tIns="0" rIns="0" bIns="0" rtlCol="0" anchor="t">
-            <a:normAutofit/>
+            <a:normAutofit lnSpcReduction="10000"/>
           </a:bodyPr>
           <a:lstStyle/>
           <a:p>
@@ -3526,7 +4350,7 @@
           <p:nvPr/>
         </p:nvPicPr>
         <p:blipFill>
-          <a:blip r:embed="rId1"/>
+          <a:blip r:embed="rId3"/>
           <a:stretch>
             <a:fillRect/>
           </a:stretch>
@@ -3687,6 +4511,13 @@
             </a:outerShdw>
           </a:effectLst>
         </p:spPr>
+        <p:txBody>
+          <a:bodyPr/>
+          <a:lstStyle/>
+          <a:p>
+            <a:endParaRPr lang="zh-CN" altLang="en-US"/>
+          </a:p>
+        </p:txBody>
       </p:sp>
       <p:sp>
         <p:nvSpPr>
@@ -3719,6 +4550,13 @@
             </a:outerShdw>
           </a:effectLst>
         </p:spPr>
+        <p:txBody>
+          <a:bodyPr/>
+          <a:lstStyle/>
+          <a:p>
+            <a:endParaRPr lang="zh-CN" altLang="en-US"/>
+          </a:p>
+        </p:txBody>
       </p:sp>
       <p:pic>
         <p:nvPicPr>
@@ -3733,7 +4571,7 @@
           </p:nvPr>
         </p:nvPicPr>
         <p:blipFill>
-          <a:blip r:embed="rId4"/>
+          <a:blip r:embed="rId15"/>
           <a:stretch>
             <a:fillRect/>
           </a:stretch>
@@ -3751,6 +4589,51 @@
       <p:sp>
         <p:nvSpPr>
           <p:cNvPr id="7" name="Text 4"/>
+          <p:cNvSpPr/>
+          <p:nvPr>
+            <p:custDataLst>
+              <p:tags r:id="rId4"/>
+            </p:custDataLst>
+          </p:nvPr>
+        </p:nvSpPr>
+        <p:spPr>
+          <a:xfrm>
+            <a:off x="952476" y="1811734"/>
+            <a:ext cx="2878264" cy="266700"/>
+          </a:xfrm>
+          <a:prstGeom prst="rect">
+            <a:avLst/>
+          </a:prstGeom>
+          <a:noFill/>
+        </p:spPr>
+        <p:txBody>
+          <a:bodyPr wrap="none" lIns="0" tIns="0" rIns="0" bIns="0" rtlCol="0" anchor="t"/>
+          <a:lstStyle/>
+          <a:p>
+            <a:pPr marL="0" indent="0" algn="l">
+              <a:lnSpc>
+                <a:spcPct val="83000"/>
+              </a:lnSpc>
+              <a:buNone/>
+            </a:pPr>
+            <a:r>
+              <a:rPr lang="en-US" sz="2100" dirty="0">
+                <a:solidFill>
+                  <a:srgbClr val="051D3A"/>
+                </a:solidFill>
+                <a:latin typeface="Funnel Display SemiBold" pitchFamily="34" charset="0"/>
+                <a:ea typeface="Funnel Display SemiBold" pitchFamily="34" charset="-122"/>
+                <a:cs typeface="Funnel Display SemiBold" pitchFamily="34" charset="-120"/>
+              </a:rPr>
+              <a:t>CORE OUTPUT 01</a:t>
+            </a:r>
+            <a:endParaRPr lang="en-US" sz="2100" dirty="0"/>
+          </a:p>
+        </p:txBody>
+      </p:sp>
+      <p:sp>
+        <p:nvSpPr>
+          <p:cNvPr id="8" name="Text 5"/>
           <p:cNvSpPr/>
           <p:nvPr>
             <p:custDataLst>
@@ -3760,8 +4643,8 @@
         </p:nvSpPr>
         <p:spPr>
           <a:xfrm>
-            <a:off x="952476" y="1811734"/>
-            <a:ext cx="2878264" cy="266700"/>
+            <a:off x="888978" y="2322909"/>
+            <a:ext cx="4775081" cy="335260"/>
           </a:xfrm>
           <a:prstGeom prst="rect">
             <a:avLst/>
@@ -3774,28 +4657,28 @@
           <a:p>
             <a:pPr marL="0" indent="0" algn="l">
               <a:lnSpc>
-                <a:spcPct val="83000"/>
-              </a:lnSpc>
-              <a:buNone/>
-            </a:pPr>
-            <a:r>
-              <a:rPr lang="en-US" sz="2100" dirty="0">
-                <a:solidFill>
-                  <a:srgbClr val="051D3A"/>
-                </a:solidFill>
-                <a:latin typeface="Funnel Display SemiBold" pitchFamily="34" charset="0"/>
-                <a:ea typeface="Funnel Display SemiBold" pitchFamily="34" charset="-122"/>
-                <a:cs typeface="Funnel Display SemiBold" pitchFamily="34" charset="-120"/>
-              </a:rPr>
-              <a:t>CORE OUTPUT 01</a:t>
-            </a:r>
-            <a:endParaRPr lang="en-US" sz="2100" dirty="0"/>
-          </a:p>
-        </p:txBody>
-      </p:sp>
-      <p:sp>
-        <p:nvSpPr>
-          <p:cNvPr id="8" name="Text 5"/>
+                <a:spcPct val="100000"/>
+              </a:lnSpc>
+              <a:buNone/>
+            </a:pPr>
+            <a:r>
+              <a:rPr lang="en-US" sz="2200" kern="100" spc="-11" dirty="0">
+                <a:solidFill>
+                  <a:srgbClr val="2B3541"/>
+                </a:solidFill>
+                <a:latin typeface="Funnel Sans SemiBold" pitchFamily="34" charset="0"/>
+                <a:ea typeface="Funnel Sans SemiBold" pitchFamily="34" charset="-122"/>
+                <a:cs typeface="Funnel Sans SemiBold" pitchFamily="34" charset="-120"/>
+              </a:rPr>
+              <a:t>Live action recognition</a:t>
+            </a:r>
+            <a:endParaRPr lang="en-US" sz="2200" dirty="0"/>
+          </a:p>
+        </p:txBody>
+      </p:sp>
+      <p:sp>
+        <p:nvSpPr>
+          <p:cNvPr id="9" name="Text 6"/>
           <p:cNvSpPr/>
           <p:nvPr>
             <p:custDataLst>
@@ -3805,93 +4688,48 @@
         </p:nvSpPr>
         <p:spPr>
           <a:xfrm>
-            <a:off x="888978" y="2322909"/>
-            <a:ext cx="4775081" cy="335260"/>
-          </a:xfrm>
-          <a:prstGeom prst="rect">
-            <a:avLst/>
-          </a:prstGeom>
-          <a:noFill/>
-        </p:spPr>
-        <p:txBody>
-          <a:bodyPr wrap="none" lIns="0" tIns="0" rIns="0" bIns="0" rtlCol="0" anchor="t"/>
-          <a:lstStyle/>
-          <a:p>
-            <a:pPr marL="0" indent="0" algn="l">
-              <a:lnSpc>
-                <a:spcPct val="100000"/>
-              </a:lnSpc>
-              <a:buNone/>
-            </a:pPr>
-            <a:r>
-              <a:rPr lang="en-US" sz="2200" kern="100" spc="-11" dirty="0">
+            <a:off x="888978" y="2807395"/>
+            <a:ext cx="4775081" cy="586581"/>
+          </a:xfrm>
+          <a:prstGeom prst="rect">
+            <a:avLst/>
+          </a:prstGeom>
+          <a:noFill/>
+        </p:spPr>
+        <p:txBody>
+          <a:bodyPr wrap="square" lIns="0" tIns="0" rIns="0" bIns="0" rtlCol="0" anchor="t">
+            <a:normAutofit/>
+          </a:bodyPr>
+          <a:lstStyle/>
+          <a:p>
+            <a:pPr marL="0" indent="0" algn="l">
+              <a:lnSpc>
+                <a:spcPct val="117000"/>
+              </a:lnSpc>
+              <a:buNone/>
+            </a:pPr>
+            <a:r>
+              <a:rPr lang="en-US" sz="1650" dirty="0">
                 <a:solidFill>
                   <a:srgbClr val="2B3541"/>
                 </a:solidFill>
-                <a:latin typeface="Funnel Sans SemiBold" pitchFamily="34" charset="0"/>
-                <a:ea typeface="Funnel Sans SemiBold" pitchFamily="34" charset="-122"/>
-                <a:cs typeface="Funnel Sans SemiBold" pitchFamily="34" charset="-120"/>
-              </a:rPr>
-              <a:t>Live action recognition</a:t>
-            </a:r>
-            <a:endParaRPr lang="en-US" sz="2200" dirty="0"/>
-          </a:p>
-        </p:txBody>
-      </p:sp>
-      <p:sp>
-        <p:nvSpPr>
-          <p:cNvPr id="9" name="Text 6"/>
+                <a:latin typeface="Funnel Sans" pitchFamily="34" charset="0"/>
+                <a:ea typeface="Funnel Sans" pitchFamily="34" charset="-122"/>
+                <a:cs typeface="Funnel Sans" pitchFamily="34" charset="-120"/>
+              </a:rPr>
+              <a:t>Show the current action and a timeline with real timestamps.</a:t>
+            </a:r>
+            <a:endParaRPr lang="en-US" sz="1650" dirty="0"/>
+          </a:p>
+        </p:txBody>
+      </p:sp>
+      <p:sp>
+        <p:nvSpPr>
+          <p:cNvPr id="10" name="Shape 7"/>
           <p:cNvSpPr/>
           <p:nvPr>
             <p:custDataLst>
               <p:tags r:id="rId7"/>
-            </p:custDataLst>
-          </p:nvPr>
-        </p:nvSpPr>
-        <p:spPr>
-          <a:xfrm>
-            <a:off x="888978" y="2807395"/>
-            <a:ext cx="4775081" cy="586581"/>
-          </a:xfrm>
-          <a:prstGeom prst="rect">
-            <a:avLst/>
-          </a:prstGeom>
-          <a:noFill/>
-        </p:spPr>
-        <p:txBody>
-          <a:bodyPr wrap="square" lIns="0" tIns="0" rIns="0" bIns="0" rtlCol="0" anchor="t">
-            <a:normAutofit/>
-          </a:bodyPr>
-          <a:lstStyle/>
-          <a:p>
-            <a:pPr marL="0" indent="0" algn="l">
-              <a:lnSpc>
-                <a:spcPct val="117000"/>
-              </a:lnSpc>
-              <a:buNone/>
-            </a:pPr>
-            <a:r>
-              <a:rPr lang="en-US" sz="1650" dirty="0">
-                <a:solidFill>
-                  <a:srgbClr val="2B3541"/>
-                </a:solidFill>
-                <a:latin typeface="Funnel Sans" pitchFamily="34" charset="0"/>
-                <a:ea typeface="Funnel Sans" pitchFamily="34" charset="-122"/>
-                <a:cs typeface="Funnel Sans" pitchFamily="34" charset="-120"/>
-              </a:rPr>
-              <a:t>Show the current action and a timeline with real timestamps.</a:t>
-            </a:r>
-            <a:endParaRPr lang="en-US" sz="1650" dirty="0"/>
-          </a:p>
-        </p:txBody>
-      </p:sp>
-      <p:sp>
-        <p:nvSpPr>
-          <p:cNvPr id="10" name="Shape 7"/>
-          <p:cNvSpPr/>
-          <p:nvPr>
-            <p:custDataLst>
-              <p:tags r:id="rId8"/>
             </p:custDataLst>
           </p:nvPr>
         </p:nvSpPr>
@@ -3916,6 +4754,13 @@
             </a:outerShdw>
           </a:effectLst>
         </p:spPr>
+        <p:txBody>
+          <a:bodyPr/>
+          <a:lstStyle/>
+          <a:p>
+            <a:endParaRPr lang="zh-CN" altLang="en-US"/>
+          </a:p>
+        </p:txBody>
       </p:sp>
       <p:sp>
         <p:nvSpPr>
@@ -3923,7 +4768,7 @@
           <p:cNvSpPr/>
           <p:nvPr>
             <p:custDataLst>
-              <p:tags r:id="rId9"/>
+              <p:tags r:id="rId8"/>
             </p:custDataLst>
           </p:nvPr>
         </p:nvSpPr>
@@ -3948,6 +4793,13 @@
             </a:outerShdw>
           </a:effectLst>
         </p:spPr>
+        <p:txBody>
+          <a:bodyPr/>
+          <a:lstStyle/>
+          <a:p>
+            <a:endParaRPr lang="zh-CN" altLang="en-US"/>
+          </a:p>
+        </p:txBody>
       </p:sp>
       <p:pic>
         <p:nvPicPr>
@@ -3957,12 +4809,12 @@
           </p:cNvPicPr>
           <p:nvPr>
             <p:custDataLst>
-              <p:tags r:id="rId10"/>
+              <p:tags r:id="rId9"/>
             </p:custDataLst>
           </p:nvPr>
         </p:nvPicPr>
         <p:blipFill>
-          <a:blip r:embed="rId4"/>
+          <a:blip r:embed="rId15"/>
           <a:stretch>
             <a:fillRect/>
           </a:stretch>
@@ -3980,6 +4832,51 @@
       <p:sp>
         <p:nvSpPr>
           <p:cNvPr id="13" name="Text 9"/>
+          <p:cNvSpPr/>
+          <p:nvPr>
+            <p:custDataLst>
+              <p:tags r:id="rId10"/>
+            </p:custDataLst>
+          </p:nvPr>
+        </p:nvSpPr>
+        <p:spPr>
+          <a:xfrm>
+            <a:off x="6591135" y="1811734"/>
+            <a:ext cx="2878264" cy="266700"/>
+          </a:xfrm>
+          <a:prstGeom prst="rect">
+            <a:avLst/>
+          </a:prstGeom>
+          <a:noFill/>
+        </p:spPr>
+        <p:txBody>
+          <a:bodyPr wrap="none" lIns="0" tIns="0" rIns="0" bIns="0" rtlCol="0" anchor="t"/>
+          <a:lstStyle/>
+          <a:p>
+            <a:pPr marL="0" indent="0" algn="l">
+              <a:lnSpc>
+                <a:spcPct val="83000"/>
+              </a:lnSpc>
+              <a:buNone/>
+            </a:pPr>
+            <a:r>
+              <a:rPr lang="en-US" sz="2100" dirty="0">
+                <a:solidFill>
+                  <a:srgbClr val="051D3A"/>
+                </a:solidFill>
+                <a:latin typeface="Funnel Display SemiBold" pitchFamily="34" charset="0"/>
+                <a:ea typeface="Funnel Display SemiBold" pitchFamily="34" charset="-122"/>
+                <a:cs typeface="Funnel Display SemiBold" pitchFamily="34" charset="-120"/>
+              </a:rPr>
+              <a:t>CORE OUTPUT 02</a:t>
+            </a:r>
+            <a:endParaRPr lang="en-US" sz="2100" dirty="0"/>
+          </a:p>
+        </p:txBody>
+      </p:sp>
+      <p:sp>
+        <p:nvSpPr>
+          <p:cNvPr id="14" name="Text 10"/>
           <p:cNvSpPr/>
           <p:nvPr>
             <p:custDataLst>
@@ -3989,8 +4886,8 @@
         </p:nvSpPr>
         <p:spPr>
           <a:xfrm>
-            <a:off x="6591135" y="1811734"/>
-            <a:ext cx="2878264" cy="266700"/>
+            <a:off x="6527637" y="2322909"/>
+            <a:ext cx="4775081" cy="335260"/>
           </a:xfrm>
           <a:prstGeom prst="rect">
             <a:avLst/>
@@ -4003,28 +4900,28 @@
           <a:p>
             <a:pPr marL="0" indent="0" algn="l">
               <a:lnSpc>
-                <a:spcPct val="83000"/>
-              </a:lnSpc>
-              <a:buNone/>
-            </a:pPr>
-            <a:r>
-              <a:rPr lang="en-US" sz="2100" dirty="0">
-                <a:solidFill>
-                  <a:srgbClr val="051D3A"/>
-                </a:solidFill>
-                <a:latin typeface="Funnel Display SemiBold" pitchFamily="34" charset="0"/>
-                <a:ea typeface="Funnel Display SemiBold" pitchFamily="34" charset="-122"/>
-                <a:cs typeface="Funnel Display SemiBold" pitchFamily="34" charset="-120"/>
-              </a:rPr>
-              <a:t>CORE OUTPUT 02</a:t>
-            </a:r>
-            <a:endParaRPr lang="en-US" sz="2100" dirty="0"/>
-          </a:p>
-        </p:txBody>
-      </p:sp>
-      <p:sp>
-        <p:nvSpPr>
-          <p:cNvPr id="14" name="Text 10"/>
+                <a:spcPct val="100000"/>
+              </a:lnSpc>
+              <a:buNone/>
+            </a:pPr>
+            <a:r>
+              <a:rPr lang="en-US" sz="2200" kern="100" spc="-11" dirty="0">
+                <a:solidFill>
+                  <a:srgbClr val="2B3541"/>
+                </a:solidFill>
+                <a:latin typeface="Funnel Sans SemiBold" pitchFamily="34" charset="0"/>
+                <a:ea typeface="Funnel Sans SemiBold" pitchFamily="34" charset="-122"/>
+                <a:cs typeface="Funnel Sans SemiBold" pitchFamily="34" charset="-120"/>
+              </a:rPr>
+              <a:t>A checkable six-step report</a:t>
+            </a:r>
+            <a:endParaRPr lang="en-US" sz="2200" dirty="0"/>
+          </a:p>
+        </p:txBody>
+      </p:sp>
+      <p:sp>
+        <p:nvSpPr>
+          <p:cNvPr id="15" name="Text 11"/>
           <p:cNvSpPr/>
           <p:nvPr>
             <p:custDataLst>
@@ -4034,8 +4931,51 @@
         </p:nvSpPr>
         <p:spPr>
           <a:xfrm>
-            <a:off x="6527637" y="2322909"/>
-            <a:ext cx="4775081" cy="335260"/>
+            <a:off x="6527637" y="2807395"/>
+            <a:ext cx="4775081" cy="586581"/>
+          </a:xfrm>
+          <a:prstGeom prst="rect">
+            <a:avLst/>
+          </a:prstGeom>
+          <a:noFill/>
+        </p:spPr>
+        <p:txBody>
+          <a:bodyPr wrap="square" lIns="0" tIns="0" rIns="0" bIns="0" rtlCol="0" anchor="t">
+            <a:normAutofit/>
+          </a:bodyPr>
+          <a:lstStyle/>
+          <a:p>
+            <a:pPr marL="0" indent="0" algn="l">
+              <a:lnSpc>
+                <a:spcPct val="117000"/>
+              </a:lnSpc>
+              <a:buNone/>
+            </a:pPr>
+            <a:r>
+              <a:rPr lang="en-US" sz="1650" dirty="0">
+                <a:solidFill>
+                  <a:srgbClr val="2B3541"/>
+                </a:solidFill>
+                <a:latin typeface="Funnel Sans" pitchFamily="34" charset="0"/>
+                <a:ea typeface="Funnel Sans" pitchFamily="34" charset="-122"/>
+                <a:cs typeface="Funnel Sans" pitchFamily="34" charset="-120"/>
+              </a:rPr>
+              <a:t>Summarize coverage, order, duration and repeated or missed steps.</a:t>
+            </a:r>
+            <a:endParaRPr lang="en-US" sz="1650" dirty="0"/>
+          </a:p>
+        </p:txBody>
+      </p:sp>
+      <p:sp>
+        <p:nvSpPr>
+          <p:cNvPr id="16" name="Text 12"/>
+          <p:cNvSpPr/>
+          <p:nvPr/>
+        </p:nvSpPr>
+        <p:spPr>
+          <a:xfrm>
+            <a:off x="609585" y="3978176"/>
+            <a:ext cx="11582110" cy="190500"/>
           </a:xfrm>
           <a:prstGeom prst="rect">
             <a:avLst/>
@@ -4048,107 +4988,19 @@
           <a:p>
             <a:pPr marL="0" indent="0" algn="l">
               <a:lnSpc>
-                <a:spcPct val="100000"/>
-              </a:lnSpc>
-              <a:buNone/>
-            </a:pPr>
-            <a:r>
-              <a:rPr lang="en-US" sz="2200" kern="100" spc="-11" dirty="0">
-                <a:solidFill>
-                  <a:srgbClr val="2B3541"/>
+                <a:spcPct val="104000"/>
+              </a:lnSpc>
+              <a:buNone/>
+            </a:pPr>
+            <a:r>
+              <a:rPr lang="en-US" sz="1200" kern="100" spc="96" dirty="0">
+                <a:solidFill>
+                  <a:srgbClr val="8A3FA8"/>
                 </a:solidFill>
                 <a:latin typeface="Funnel Sans SemiBold" pitchFamily="34" charset="0"/>
                 <a:ea typeface="Funnel Sans SemiBold" pitchFamily="34" charset="-122"/>
                 <a:cs typeface="Funnel Sans SemiBold" pitchFamily="34" charset="-120"/>
               </a:rPr>
-              <a:t>A checkable six-step report</a:t>
-            </a:r>
-            <a:endParaRPr lang="en-US" sz="2200" dirty="0"/>
-          </a:p>
-        </p:txBody>
-      </p:sp>
-      <p:sp>
-        <p:nvSpPr>
-          <p:cNvPr id="15" name="Text 11"/>
-          <p:cNvSpPr/>
-          <p:nvPr>
-            <p:custDataLst>
-              <p:tags r:id="rId13"/>
-            </p:custDataLst>
-          </p:nvPr>
-        </p:nvSpPr>
-        <p:spPr>
-          <a:xfrm>
-            <a:off x="6527637" y="2807395"/>
-            <a:ext cx="4775081" cy="586581"/>
-          </a:xfrm>
-          <a:prstGeom prst="rect">
-            <a:avLst/>
-          </a:prstGeom>
-          <a:noFill/>
-        </p:spPr>
-        <p:txBody>
-          <a:bodyPr wrap="square" lIns="0" tIns="0" rIns="0" bIns="0" rtlCol="0" anchor="t">
-            <a:normAutofit/>
-          </a:bodyPr>
-          <a:lstStyle/>
-          <a:p>
-            <a:pPr marL="0" indent="0" algn="l">
-              <a:lnSpc>
-                <a:spcPct val="117000"/>
-              </a:lnSpc>
-              <a:buNone/>
-            </a:pPr>
-            <a:r>
-              <a:rPr lang="en-US" sz="1650" dirty="0">
-                <a:solidFill>
-                  <a:srgbClr val="2B3541"/>
-                </a:solidFill>
-                <a:latin typeface="Funnel Sans" pitchFamily="34" charset="0"/>
-                <a:ea typeface="Funnel Sans" pitchFamily="34" charset="-122"/>
-                <a:cs typeface="Funnel Sans" pitchFamily="34" charset="-120"/>
-              </a:rPr>
-              <a:t>Summarize coverage, order, duration and repeated or missed steps.</a:t>
-            </a:r>
-            <a:endParaRPr lang="en-US" sz="1650" dirty="0"/>
-          </a:p>
-        </p:txBody>
-      </p:sp>
-      <p:sp>
-        <p:nvSpPr>
-          <p:cNvPr id="16" name="Text 12"/>
-          <p:cNvSpPr/>
-          <p:nvPr/>
-        </p:nvSpPr>
-        <p:spPr>
-          <a:xfrm>
-            <a:off x="609585" y="3978176"/>
-            <a:ext cx="11582110" cy="190500"/>
-          </a:xfrm>
-          <a:prstGeom prst="rect">
-            <a:avLst/>
-          </a:prstGeom>
-          <a:noFill/>
-        </p:spPr>
-        <p:txBody>
-          <a:bodyPr wrap="none" lIns="0" tIns="0" rIns="0" bIns="0" rtlCol="0" anchor="t"/>
-          <a:lstStyle/>
-          <a:p>
-            <a:pPr marL="0" indent="0" algn="l">
-              <a:lnSpc>
-                <a:spcPct val="104000"/>
-              </a:lnSpc>
-              <a:buNone/>
-            </a:pPr>
-            <a:r>
-              <a:rPr lang="en-US" sz="1200" kern="100" spc="96" dirty="0">
-                <a:solidFill>
-                  <a:srgbClr val="8A3FA8"/>
-                </a:solidFill>
-                <a:latin typeface="Funnel Sans SemiBold" pitchFamily="34" charset="0"/>
-                <a:ea typeface="Funnel Sans SemiBold" pitchFamily="34" charset="-122"/>
-                <a:cs typeface="Funnel Sans SemiBold" pitchFamily="34" charset="-120"/>
-              </a:rPr>
               <a:t>THE RESEARCH QUESTION</a:t>
             </a:r>
             <a:endParaRPr lang="en-US" sz="1200" dirty="0"/>
@@ -4173,7 +5025,7 @@
         </p:spPr>
         <p:txBody>
           <a:bodyPr wrap="square" lIns="0" tIns="0" rIns="0" bIns="0" rtlCol="0" anchor="t">
-            <a:normAutofit/>
+            <a:normAutofit lnSpcReduction="10000"/>
           </a:bodyPr>
           <a:lstStyle/>
           <a:p>
@@ -4344,7 +5196,7 @@
           <p:nvPr/>
         </p:nvPicPr>
         <p:blipFill>
-          <a:blip r:embed="rId1"/>
+          <a:blip r:embed="rId3"/>
           <a:stretch>
             <a:fillRect/>
           </a:stretch>
@@ -4468,6 +5320,13 @@
             </a:outerShdw>
           </a:effectLst>
         </p:spPr>
+        <p:txBody>
+          <a:bodyPr/>
+          <a:lstStyle/>
+          <a:p>
+            <a:endParaRPr lang="zh-CN" altLang="en-US"/>
+          </a:p>
+        </p:txBody>
       </p:sp>
       <p:sp>
         <p:nvSpPr>
@@ -4651,7 +5510,7 @@
                 <a:ea typeface="Funnel Sans" pitchFamily="34" charset="-122"/>
                 <a:cs typeface="Funnel Sans" pitchFamily="34" charset="-120"/>
               </a:rPr>
-              <a:t>1 of 11 shards verified locally</a:t>
+              <a:t>2 of 11 shards in use</a:t>
             </a:r>
             <a:endParaRPr lang="en-US" sz="1250" dirty="0"/>
           </a:p>
@@ -4671,7 +5530,7 @@
                 <a:ea typeface="Funnel Sans" pitchFamily="34" charset="-122"/>
                 <a:cs typeface="Funnel Sans" pitchFamily="34" charset="-120"/>
               </a:rPr>
-              <a:t>(DataSet4)</a:t>
+              <a:t>(DataSet1, DataSet4)</a:t>
             </a:r>
             <a:endParaRPr lang="en-US" sz="1250" dirty="0"/>
           </a:p>
@@ -4704,6 +5563,13 @@
             </a:outerShdw>
           </a:effectLst>
         </p:spPr>
+        <p:txBody>
+          <a:bodyPr/>
+          <a:lstStyle/>
+          <a:p>
+            <a:endParaRPr lang="zh-CN" altLang="en-US"/>
+          </a:p>
+        </p:txBody>
       </p:sp>
       <p:sp>
         <p:nvSpPr>
@@ -4920,6 +5786,13 @@
             </a:outerShdw>
           </a:effectLst>
         </p:spPr>
+        <p:txBody>
+          <a:bodyPr/>
+          <a:lstStyle/>
+          <a:p>
+            <a:endParaRPr lang="zh-CN" altLang="en-US"/>
+          </a:p>
+        </p:txBody>
       </p:sp>
       <p:sp>
         <p:nvSpPr>
@@ -5144,7 +6017,7 @@
                 <a:ea typeface="Funnel Sans" pitchFamily="34" charset="-122"/>
                 <a:cs typeface="Funnel Sans" pitchFamily="34" charset="-120"/>
               </a:rPr>
-              <a:t>Before training: clean the data and spot-check labels by hand.</a:t>
+              <a:t>Before formal training: clean the data and spot-check labels by hand.</a:t>
             </a:r>
             <a:endParaRPr lang="en-US" sz="1650" dirty="0"/>
           </a:p>
@@ -5355,6 +6228,13 @@
             </a:outerShdw>
           </a:effectLst>
         </p:spPr>
+        <p:txBody>
+          <a:bodyPr/>
+          <a:lstStyle/>
+          <a:p>
+            <a:endParaRPr lang="zh-CN" altLang="en-US"/>
+          </a:p>
+        </p:txBody>
       </p:sp>
       <p:sp>
         <p:nvSpPr>
@@ -5381,6 +6261,13 @@
             </a:outerShdw>
           </a:effectLst>
         </p:spPr>
+        <p:txBody>
+          <a:bodyPr/>
+          <a:lstStyle/>
+          <a:p>
+            <a:endParaRPr lang="zh-CN" altLang="en-US"/>
+          </a:p>
+        </p:txBody>
       </p:sp>
       <p:pic>
         <p:nvPicPr>
@@ -5391,7 +6278,7 @@
           <p:nvPr/>
         </p:nvPicPr>
         <p:blipFill>
-          <a:blip r:embed="rId1"/>
+          <a:blip r:embed="rId3"/>
           <a:stretch>
             <a:fillRect/>
           </a:stretch>
@@ -5465,6 +6352,13 @@
             <a:srgbClr val="B8367F"/>
           </a:solidFill>
         </p:spPr>
+        <p:txBody>
+          <a:bodyPr/>
+          <a:lstStyle/>
+          <a:p>
+            <a:endParaRPr lang="zh-CN" altLang="en-US"/>
+          </a:p>
+        </p:txBody>
       </p:sp>
       <p:sp>
         <p:nvSpPr>
@@ -5575,6 +6469,13 @@
             </a:outerShdw>
           </a:effectLst>
         </p:spPr>
+        <p:txBody>
+          <a:bodyPr/>
+          <a:lstStyle/>
+          <a:p>
+            <a:endParaRPr lang="zh-CN" altLang="en-US"/>
+          </a:p>
+        </p:txBody>
       </p:sp>
       <p:sp>
         <p:nvSpPr>
@@ -5601,6 +6502,13 @@
             </a:outerShdw>
           </a:effectLst>
         </p:spPr>
+        <p:txBody>
+          <a:bodyPr/>
+          <a:lstStyle/>
+          <a:p>
+            <a:endParaRPr lang="zh-CN" altLang="en-US"/>
+          </a:p>
+        </p:txBody>
       </p:sp>
       <p:pic>
         <p:nvPicPr>
@@ -5611,7 +6519,7 @@
           <p:nvPr/>
         </p:nvPicPr>
         <p:blipFill>
-          <a:blip r:embed="rId1"/>
+          <a:blip r:embed="rId3"/>
           <a:stretch>
             <a:fillRect/>
           </a:stretch>
@@ -5685,6 +6593,13 @@
             <a:srgbClr val="B8367F"/>
           </a:solidFill>
         </p:spPr>
+        <p:txBody>
+          <a:bodyPr/>
+          <a:lstStyle/>
+          <a:p>
+            <a:endParaRPr lang="zh-CN" altLang="en-US"/>
+          </a:p>
+        </p:txBody>
       </p:sp>
       <p:sp>
         <p:nvSpPr>
@@ -5795,6 +6710,13 @@
             </a:outerShdw>
           </a:effectLst>
         </p:spPr>
+        <p:txBody>
+          <a:bodyPr/>
+          <a:lstStyle/>
+          <a:p>
+            <a:endParaRPr lang="zh-CN" altLang="en-US"/>
+          </a:p>
+        </p:txBody>
       </p:sp>
       <p:sp>
         <p:nvSpPr>
@@ -5821,6 +6743,13 @@
             </a:outerShdw>
           </a:effectLst>
         </p:spPr>
+        <p:txBody>
+          <a:bodyPr/>
+          <a:lstStyle/>
+          <a:p>
+            <a:endParaRPr lang="zh-CN" altLang="en-US"/>
+          </a:p>
+        </p:txBody>
       </p:sp>
       <p:pic>
         <p:nvPicPr>
@@ -5831,7 +6760,7 @@
           <p:nvPr/>
         </p:nvPicPr>
         <p:blipFill>
-          <a:blip r:embed="rId1"/>
+          <a:blip r:embed="rId3"/>
           <a:stretch>
             <a:fillRect/>
           </a:stretch>
@@ -5905,6 +6834,13 @@
             <a:srgbClr val="B8367F"/>
           </a:solidFill>
         </p:spPr>
+        <p:txBody>
+          <a:bodyPr/>
+          <a:lstStyle/>
+          <a:p>
+            <a:endParaRPr lang="zh-CN" altLang="en-US"/>
+          </a:p>
+        </p:txBody>
       </p:sp>
       <p:sp>
         <p:nvSpPr>
@@ -6015,6 +6951,13 @@
             </a:outerShdw>
           </a:effectLst>
         </p:spPr>
+        <p:txBody>
+          <a:bodyPr/>
+          <a:lstStyle/>
+          <a:p>
+            <a:endParaRPr lang="zh-CN" altLang="en-US"/>
+          </a:p>
+        </p:txBody>
       </p:sp>
       <p:sp>
         <p:nvSpPr>
@@ -6313,6 +7256,13 @@
             <a:srgbClr val="E4DBF8"/>
           </a:solidFill>
         </p:spPr>
+        <p:txBody>
+          <a:bodyPr/>
+          <a:lstStyle/>
+          <a:p>
+            <a:endParaRPr lang="zh-CN" altLang="en-US"/>
+          </a:p>
+        </p:txBody>
       </p:sp>
       <p:sp>
         <p:nvSpPr>
@@ -6436,6 +7386,13 @@
             <a:srgbClr val="E4DBF8"/>
           </a:solidFill>
         </p:spPr>
+        <p:txBody>
+          <a:bodyPr/>
+          <a:lstStyle/>
+          <a:p>
+            <a:endParaRPr lang="zh-CN" altLang="en-US"/>
+          </a:p>
+        </p:txBody>
       </p:sp>
       <p:sp>
         <p:nvSpPr>
@@ -6559,6 +7516,13 @@
             <a:srgbClr val="E4DBF8"/>
           </a:solidFill>
         </p:spPr>
+        <p:txBody>
+          <a:bodyPr/>
+          <a:lstStyle/>
+          <a:p>
+            <a:endParaRPr lang="zh-CN" altLang="en-US"/>
+          </a:p>
+        </p:txBody>
       </p:sp>
       <p:sp>
         <p:nvSpPr>
@@ -6723,6 +7687,13 @@
             <a:srgbClr val="D3F0ED"/>
           </a:solidFill>
         </p:spPr>
+        <p:txBody>
+          <a:bodyPr/>
+          <a:lstStyle/>
+          <a:p>
+            <a:endParaRPr lang="zh-CN" altLang="en-US"/>
+          </a:p>
+        </p:txBody>
       </p:sp>
       <p:sp>
         <p:nvSpPr>
@@ -6846,6 +7817,13 @@
             <a:srgbClr val="D3F0ED"/>
           </a:solidFill>
         </p:spPr>
+        <p:txBody>
+          <a:bodyPr/>
+          <a:lstStyle/>
+          <a:p>
+            <a:endParaRPr lang="zh-CN" altLang="en-US"/>
+          </a:p>
+        </p:txBody>
       </p:sp>
       <p:sp>
         <p:nvSpPr>
@@ -6969,6 +7947,13 @@
             <a:srgbClr val="D3F0ED"/>
           </a:solidFill>
         </p:spPr>
+        <p:txBody>
+          <a:bodyPr/>
+          <a:lstStyle/>
+          <a:p>
+            <a:endParaRPr lang="zh-CN" altLang="en-US"/>
+          </a:p>
+        </p:txBody>
       </p:sp>
       <p:sp>
         <p:nvSpPr>
@@ -7111,7 +8096,7 @@
                 <a:ea typeface="Funnel Sans" pitchFamily="34" charset="-122"/>
                 <a:cs typeface="Funnel Sans" pitchFamily="34" charset="-120"/>
               </a:rPr>
-              <a:t>Mainline: frame training, no temporal head. Live display averages only the last 9 received frames.</a:t>
+              <a:t>Planned formal run: YOLO26n-cls, 224 px. Demo: exp.pt (YOLO26m-cls, 320 px) + GRU temporal head.</a:t>
             </a:r>
             <a:endParaRPr lang="en-US" sz="1400" dirty="0"/>
           </a:p>
@@ -7302,7 +8287,7 @@
           <p:nvPr/>
         </p:nvPicPr>
         <p:blipFill>
-          <a:blip r:embed="rId1"/>
+          <a:blip r:embed="rId3"/>
           <a:stretch>
             <a:fillRect/>
           </a:stretch>
@@ -7344,6 +8329,13 @@
             </a:outerShdw>
           </a:effectLst>
         </p:spPr>
+        <p:txBody>
+          <a:bodyPr/>
+          <a:lstStyle/>
+          <a:p>
+            <a:endParaRPr lang="zh-CN" altLang="en-US"/>
+          </a:p>
+        </p:txBody>
       </p:sp>
       <p:sp>
         <p:nvSpPr>
@@ -7370,6 +8362,13 @@
             </a:outerShdw>
           </a:effectLst>
         </p:spPr>
+        <p:txBody>
+          <a:bodyPr/>
+          <a:lstStyle/>
+          <a:p>
+            <a:endParaRPr lang="zh-CN" altLang="en-US"/>
+          </a:p>
+        </p:txBody>
       </p:sp>
       <p:pic>
         <p:nvPicPr>
@@ -7380,7 +8379,7 @@
           <p:nvPr/>
         </p:nvPicPr>
         <p:blipFill>
-          <a:blip r:embed="rId2"/>
+          <a:blip r:embed="rId4"/>
           <a:stretch>
             <a:fillRect/>
           </a:stretch>
@@ -7547,6 +8546,13 @@
             </a:outerShdw>
           </a:effectLst>
         </p:spPr>
+        <p:txBody>
+          <a:bodyPr/>
+          <a:lstStyle/>
+          <a:p>
+            <a:endParaRPr lang="zh-CN" altLang="en-US"/>
+          </a:p>
+        </p:txBody>
       </p:sp>
       <p:sp>
         <p:nvSpPr>
@@ -7573,6 +8579,13 @@
             </a:outerShdw>
           </a:effectLst>
         </p:spPr>
+        <p:txBody>
+          <a:bodyPr/>
+          <a:lstStyle/>
+          <a:p>
+            <a:endParaRPr lang="zh-CN" altLang="en-US"/>
+          </a:p>
+        </p:txBody>
       </p:sp>
       <p:pic>
         <p:nvPicPr>
@@ -7583,7 +8596,7 @@
           <p:nvPr/>
         </p:nvPicPr>
         <p:blipFill>
-          <a:blip r:embed="rId2"/>
+          <a:blip r:embed="rId4"/>
           <a:stretch>
             <a:fillRect/>
           </a:stretch>
@@ -7750,6 +8763,13 @@
             </a:outerShdw>
           </a:effectLst>
         </p:spPr>
+        <p:txBody>
+          <a:bodyPr/>
+          <a:lstStyle/>
+          <a:p>
+            <a:endParaRPr lang="zh-CN" altLang="en-US"/>
+          </a:p>
+        </p:txBody>
       </p:sp>
       <p:sp>
         <p:nvSpPr>
@@ -7776,6 +8796,13 @@
             </a:outerShdw>
           </a:effectLst>
         </p:spPr>
+        <p:txBody>
+          <a:bodyPr/>
+          <a:lstStyle/>
+          <a:p>
+            <a:endParaRPr lang="zh-CN" altLang="en-US"/>
+          </a:p>
+        </p:txBody>
       </p:sp>
       <p:pic>
         <p:nvPicPr>
@@ -7786,7 +8813,7 @@
           <p:nvPr/>
         </p:nvPicPr>
         <p:blipFill>
-          <a:blip r:embed="rId2"/>
+          <a:blip r:embed="rId4"/>
           <a:stretch>
             <a:fillRect/>
           </a:stretch>
@@ -7953,6 +8980,13 @@
             </a:outerShdw>
           </a:effectLst>
         </p:spPr>
+        <p:txBody>
+          <a:bodyPr/>
+          <a:lstStyle/>
+          <a:p>
+            <a:endParaRPr lang="zh-CN" altLang="en-US"/>
+          </a:p>
+        </p:txBody>
       </p:sp>
       <p:sp>
         <p:nvSpPr>
@@ -7979,6 +9013,13 @@
             </a:outerShdw>
           </a:effectLst>
         </p:spPr>
+        <p:txBody>
+          <a:bodyPr/>
+          <a:lstStyle/>
+          <a:p>
+            <a:endParaRPr lang="zh-CN" altLang="en-US"/>
+          </a:p>
+        </p:txBody>
       </p:sp>
       <p:pic>
         <p:nvPicPr>
@@ -7989,7 +9030,7 @@
           <p:nvPr/>
         </p:nvPicPr>
         <p:blipFill>
-          <a:blip r:embed="rId2"/>
+          <a:blip r:embed="rId4"/>
           <a:stretch>
             <a:fillRect/>
           </a:stretch>
@@ -8147,7 +9188,7 @@
         </p:spPr>
         <p:txBody>
           <a:bodyPr wrap="square" lIns="0" tIns="0" rIns="0" bIns="0" rtlCol="0" anchor="t">
-            <a:normAutofit/>
+            <a:normAutofit lnSpcReduction="10000"/>
           </a:bodyPr>
           <a:lstStyle/>
           <a:p>
@@ -8166,7 +9207,7 @@
                 <a:ea typeface="Funnel Sans SemiBold" pitchFamily="34" charset="-122"/>
                 <a:cs typeface="Funnel Sans SemiBold" pitchFamily="34" charset="-120"/>
               </a:rPr>
-              <a:t>Real-time display is provisional and averages only frames already received.</a:t>
+              <a:t>Real-time display is provisional and uses only frames already received.</a:t>
             </a:r>
             <a:endParaRPr lang="en-US" sz="1850" dirty="0"/>
           </a:p>
@@ -8229,7 +9270,7 @@
                 <a:ea typeface="Funnel Sans" pitchFamily="34" charset="-122"/>
                 <a:cs typeface="Funnel Sans" pitchFamily="34" charset="-120"/>
               </a:rPr>
-              <a:t>exp.pt: seven-class feasibility demo weights, not an accuracy result.</a:t>
+              <a:t>exp.pt + GRU head: seven-class demo model, not a final result.</a:t>
             </a:r>
             <a:endParaRPr lang="en-US" sz="1400" dirty="0"/>
           </a:p>
@@ -8296,6 +9337,380 @@
         </p:nvSpPr>
         <p:spPr>
           <a:xfrm>
+            <a:off x="609585" y="406400"/>
+            <a:ext cx="8000800" cy="190500"/>
+          </a:xfrm>
+          <a:prstGeom prst="rect">
+            <a:avLst/>
+          </a:prstGeom>
+          <a:noFill/>
+        </p:spPr>
+        <p:txBody>
+          <a:bodyPr wrap="none" lIns="0" tIns="0" rIns="0" bIns="0" rtlCol="0" anchor="t"/>
+          <a:lstStyle/>
+          <a:p>
+            <a:pPr marL="0" indent="0" algn="l">
+              <a:lnSpc>
+                <a:spcPct val="104000"/>
+              </a:lnSpc>
+              <a:buNone/>
+            </a:pPr>
+            <a:r>
+              <a:rPr lang="en-US" sz="1200" kern="100" spc="96" dirty="0">
+                <a:solidFill>
+                  <a:srgbClr val="8A3FA8"/>
+                </a:solidFill>
+                <a:latin typeface="Funnel Sans SemiBold" pitchFamily="34" charset="0"/>
+                <a:ea typeface="Funnel Sans SemiBold" pitchFamily="34" charset="-122"/>
+                <a:cs typeface="Funnel Sans SemiBold" pitchFamily="34" charset="-120"/>
+              </a:rPr>
+              <a:t>WORKING DEMO</a:t>
+            </a:r>
+            <a:endParaRPr lang="en-US" sz="1200" dirty="0"/>
+          </a:p>
+        </p:txBody>
+      </p:sp>
+      <p:sp>
+        <p:nvSpPr>
+          <p:cNvPr id="3" name="Text 1"/>
+          <p:cNvSpPr/>
+          <p:nvPr/>
+        </p:nvSpPr>
+        <p:spPr>
+          <a:xfrm>
+            <a:off x="609585" y="682625"/>
+            <a:ext cx="8000800" cy="484584"/>
+          </a:xfrm>
+          <a:prstGeom prst="rect">
+            <a:avLst/>
+          </a:prstGeom>
+          <a:noFill/>
+        </p:spPr>
+        <p:txBody>
+          <a:bodyPr wrap="none" lIns="0" tIns="0" rIns="0" bIns="0" rtlCol="0" anchor="t"/>
+          <a:lstStyle/>
+          <a:p>
+            <a:pPr marL="0" indent="0" algn="l">
+              <a:lnSpc>
+                <a:spcPct val="88000"/>
+              </a:lnSpc>
+              <a:buNone/>
+            </a:pPr>
+            <a:r>
+              <a:rPr lang="en-US" sz="3600" kern="100" spc="-36" dirty="0">
+                <a:solidFill>
+                  <a:srgbClr val="051D3A"/>
+                </a:solidFill>
+                <a:latin typeface="Funnel Display Medium" pitchFamily="34" charset="0"/>
+                <a:ea typeface="Funnel Display Medium" pitchFamily="34" charset="-122"/>
+                <a:cs typeface="Funnel Display Medium" pitchFamily="34" charset="-120"/>
+              </a:rPr>
+              <a:t>Live recognition and six-step report</a:t>
+            </a:r>
+            <a:endParaRPr lang="en-US" sz="3600" dirty="0"/>
+          </a:p>
+        </p:txBody>
+      </p:sp>
+      <p:sp>
+        <p:nvSpPr>
+          <p:cNvPr id="4" name="Text 2"/>
+          <p:cNvSpPr/>
+          <p:nvPr/>
+        </p:nvSpPr>
+        <p:spPr>
+          <a:xfrm>
+            <a:off x="609585" y="1221184"/>
+            <a:ext cx="8000800" cy="214313"/>
+          </a:xfrm>
+          <a:prstGeom prst="rect">
+            <a:avLst/>
+          </a:prstGeom>
+          <a:noFill/>
+        </p:spPr>
+        <p:txBody>
+          <a:bodyPr wrap="none" lIns="0" tIns="0" rIns="0" bIns="0" rtlCol="0" anchor="t"/>
+          <a:lstStyle/>
+          <a:p>
+            <a:pPr marL="0" indent="0" algn="l">
+              <a:lnSpc>
+                <a:spcPct val="112000"/>
+              </a:lnSpc>
+              <a:buNone/>
+            </a:pPr>
+            <a:r>
+              <a:rPr lang="en-US" sz="1250" dirty="0">
+                <a:solidFill>
+                  <a:srgbClr val="4A5563"/>
+                </a:solidFill>
+                <a:latin typeface="Funnel Sans" pitchFamily="34" charset="0"/>
+                <a:ea typeface="Funnel Sans" pitchFamily="34" charset="-122"/>
+                <a:cs typeface="Funnel Sans" pitchFamily="34" charset="-120"/>
+              </a:rPr>
+              <a:t>Public PSKUS clip · exp.pt + GRU temporal head · model output, not ground truth</a:t>
+            </a:r>
+            <a:endParaRPr lang="en-US" sz="1250" dirty="0"/>
+          </a:p>
+        </p:txBody>
+      </p:sp>
+      <p:pic>
+        <p:nvPicPr>
+          <p:cNvPr id="7" name="图片 6">
+            <a:extLst>
+              <a:ext uri="{FF2B5EF4-FFF2-40B4-BE49-F238E27FC236}">
+                <a16:creationId xmlns:a16="http://schemas.microsoft.com/office/drawing/2014/main" id="{850E87E1-C7CB-9550-D6AE-FA142E0C64CC}"/>
+              </a:ext>
+            </a:extLst>
+          </p:cNvPr>
+          <p:cNvPicPr>
+            <a:picLocks noChangeAspect="1"/>
+          </p:cNvPicPr>
+          <p:nvPr/>
+        </p:nvPicPr>
+        <p:blipFill>
+          <a:blip r:embed="rId3"/>
+          <a:stretch>
+            <a:fillRect/>
+          </a:stretch>
+        </p:blipFill>
+        <p:spPr>
+          <a:xfrm>
+            <a:off x="619249" y="2011680"/>
+            <a:ext cx="5289954" cy="3218688"/>
+          </a:xfrm>
+          <a:prstGeom prst="rect">
+            <a:avLst/>
+          </a:prstGeom>
+        </p:spPr>
+      </p:pic>
+      <p:pic>
+        <p:nvPicPr>
+          <p:cNvPr id="8" name="Report screenshot"/>
+          <p:cNvPicPr>
+            <a:picLocks noChangeAspect="1"/>
+          </p:cNvPicPr>
+          <p:nvPr/>
+        </p:nvPicPr>
+        <p:blipFill>
+          <a:blip r:embed="rId4"/>
+          <a:stretch>
+            <a:fillRect/>
+          </a:stretch>
+        </p:blipFill>
+        <p:spPr>
+          <a:xfrm>
+            <a:off x="6183523" y="2011680"/>
+            <a:ext cx="5389228" cy="3218688"/>
+          </a:xfrm>
+          <a:prstGeom prst="rect">
+            <a:avLst/>
+          </a:prstGeom>
+        </p:spPr>
+      </p:pic>
+      <p:sp>
+        <p:nvSpPr>
+          <p:cNvPr id="9" name="Label live"/>
+          <p:cNvSpPr/>
+          <p:nvPr/>
+        </p:nvSpPr>
+        <p:spPr>
+          <a:xfrm>
+            <a:off x="619249" y="1737360"/>
+            <a:ext cx="5289954" cy="190500"/>
+          </a:xfrm>
+          <a:prstGeom prst="rect">
+            <a:avLst/>
+          </a:prstGeom>
+          <a:noFill/>
+        </p:spPr>
+        <p:txBody>
+          <a:bodyPr wrap="none" lIns="0" tIns="0" rIns="0" bIns="0" rtlCol="0" anchor="t"/>
+          <a:lstStyle/>
+          <a:p>
+            <a:pPr marL="0" indent="0" algn="l">
+              <a:lnSpc>
+                <a:spcPct val="104000"/>
+              </a:lnSpc>
+              <a:buNone/>
+            </a:pPr>
+            <a:r>
+              <a:rPr lang="en-US" sz="1200" kern="100" spc="96" dirty="0">
+                <a:solidFill>
+                  <a:srgbClr val="8A3FA8"/>
+                </a:solidFill>
+                <a:latin typeface="Funnel Sans SemiBold" pitchFamily="34" charset="0"/>
+                <a:ea typeface="Funnel Sans SemiBold" pitchFamily="34" charset="-122"/>
+                <a:cs typeface="Funnel Sans SemiBold" pitchFamily="34" charset="-120"/>
+              </a:rPr>
+              <a:t>LIVE VIEW</a:t>
+            </a:r>
+            <a:endParaRPr lang="en-US" sz="1200" dirty="0"/>
+          </a:p>
+        </p:txBody>
+      </p:sp>
+      <p:sp>
+        <p:nvSpPr>
+          <p:cNvPr id="10" name="Label report"/>
+          <p:cNvSpPr/>
+          <p:nvPr/>
+        </p:nvSpPr>
+        <p:spPr>
+          <a:xfrm>
+            <a:off x="6183523" y="1737360"/>
+            <a:ext cx="5389228" cy="190500"/>
+          </a:xfrm>
+          <a:prstGeom prst="rect">
+            <a:avLst/>
+          </a:prstGeom>
+          <a:noFill/>
+        </p:spPr>
+        <p:txBody>
+          <a:bodyPr wrap="none" lIns="0" tIns="0" rIns="0" bIns="0" rtlCol="0" anchor="t"/>
+          <a:lstStyle/>
+          <a:p>
+            <a:pPr marL="0" indent="0" algn="l">
+              <a:lnSpc>
+                <a:spcPct val="104000"/>
+              </a:lnSpc>
+              <a:buNone/>
+            </a:pPr>
+            <a:r>
+              <a:rPr lang="en-US" sz="1200" kern="100" spc="96" dirty="0">
+                <a:solidFill>
+                  <a:srgbClr val="8A3FA8"/>
+                </a:solidFill>
+                <a:latin typeface="Funnel Sans SemiBold" pitchFamily="34" charset="0"/>
+                <a:ea typeface="Funnel Sans SemiBold" pitchFamily="34" charset="-122"/>
+                <a:cs typeface="Funnel Sans SemiBold" pitchFamily="34" charset="-120"/>
+              </a:rPr>
+              <a:t>FINAL REPORT</a:t>
+            </a:r>
+            <a:endParaRPr lang="en-US" sz="1200" dirty="0"/>
+          </a:p>
+        </p:txBody>
+      </p:sp>
+      <p:sp>
+        <p:nvSpPr>
+          <p:cNvPr id="11" name="Caption live"/>
+          <p:cNvSpPr/>
+          <p:nvPr/>
+        </p:nvSpPr>
+        <p:spPr>
+          <a:xfrm>
+            <a:off x="619249" y="5367528"/>
+            <a:ext cx="5289954" cy="457200"/>
+          </a:xfrm>
+          <a:prstGeom prst="rect">
+            <a:avLst/>
+          </a:prstGeom>
+          <a:noFill/>
+        </p:spPr>
+        <p:txBody>
+          <a:bodyPr wrap="square" lIns="0" tIns="0" rIns="0" bIns="0" rtlCol="0" anchor="t"/>
+          <a:lstStyle/>
+          <a:p>
+            <a:pPr marL="0" indent="0" algn="l">
+              <a:lnSpc>
+                <a:spcPct val="112000"/>
+              </a:lnSpc>
+              <a:buNone/>
+            </a:pPr>
+            <a:r>
+              <a:rPr lang="en-US" sz="1250" dirty="0">
+                <a:solidFill>
+                  <a:srgbClr val="4A5563"/>
+                </a:solidFill>
+                <a:latin typeface="Funnel Sans" pitchFamily="34" charset="0"/>
+                <a:ea typeface="Funnel Sans" pitchFamily="34" charset="-122"/>
+                <a:cs typeface="Funnel Sans" pitchFamily="34" charset="-120"/>
+              </a:rPr>
+              <a:t>Each step is recognised for 5.0–8.0 s; the clip ends on Other once the hands leave the view.</a:t>
+            </a:r>
+            <a:endParaRPr lang="en-US" sz="1250" dirty="0"/>
+          </a:p>
+        </p:txBody>
+      </p:sp>
+      <p:sp>
+        <p:nvSpPr>
+          <p:cNvPr id="12" name="Caption report"/>
+          <p:cNvSpPr/>
+          <p:nvPr/>
+        </p:nvSpPr>
+        <p:spPr>
+          <a:xfrm>
+            <a:off x="6183523" y="5367528"/>
+            <a:ext cx="5389228" cy="457200"/>
+          </a:xfrm>
+          <a:prstGeom prst="rect">
+            <a:avLst/>
+          </a:prstGeom>
+          <a:noFill/>
+        </p:spPr>
+        <p:txBody>
+          <a:bodyPr wrap="square" lIns="0" tIns="0" rIns="0" bIns="0" rtlCol="0" anchor="t"/>
+          <a:lstStyle/>
+          <a:p>
+            <a:pPr marL="0" indent="0" algn="l">
+              <a:lnSpc>
+                <a:spcPct val="112000"/>
+              </a:lnSpc>
+              <a:buNone/>
+            </a:pPr>
+            <a:r>
+              <a:rPr lang="en-US" sz="1250" dirty="0">
+                <a:solidFill>
+                  <a:srgbClr val="4A5563"/>
+                </a:solidFill>
+                <a:latin typeface="Funnel Sans" pitchFamily="34" charset="0"/>
+                <a:ea typeface="Funnel Sans" pitchFamily="34" charset="-122"/>
+                <a:cs typeface="Funnel Sans" pitchFamily="34" charset="-120"/>
+              </a:rPr>
+              <a:t>6/6 steps in order, score 95; flagged: 37.2 s of rubbing, below the 40 s WHO guidance.</a:t>
+            </a:r>
+            <a:endParaRPr lang="en-US" sz="1250" dirty="0"/>
+          </a:p>
+        </p:txBody>
+      </p:sp>
+    </p:spTree>
+  </p:cSld>
+  <p:clrMapOvr>
+    <a:masterClrMapping/>
+  </p:clrMapOvr>
+</p:sld>
+</file>
+
+<file path=ppt/slides/slide9.xml><?xml version="1.0" encoding="utf-8"?>
+<p:sld xmlns:a="http://schemas.openxmlformats.org/drawingml/2006/main" xmlns:r="http://schemas.openxmlformats.org/officeDocument/2006/relationships" xmlns:p="http://schemas.openxmlformats.org/presentationml/2006/main">
+  <p:cSld>
+    <p:bg>
+      <p:bgPr>
+        <a:solidFill>
+          <a:srgbClr val="FAF5EB"/>
+        </a:solidFill>
+        <a:effectLst/>
+      </p:bgPr>
+    </p:bg>
+    <p:spTree>
+      <p:nvGrpSpPr>
+        <p:cNvPr id="1" name=""/>
+        <p:cNvGrpSpPr/>
+        <p:nvPr/>
+      </p:nvGrpSpPr>
+      <p:grpSpPr>
+        <a:xfrm>
+          <a:off x="0" y="0"/>
+          <a:ext cx="0" cy="0"/>
+          <a:chOff x="0" y="0"/>
+          <a:chExt cx="0" cy="0"/>
+        </a:xfrm>
+      </p:grpSpPr>
+      <p:sp>
+        <p:nvSpPr>
+          <p:cNvPr id="2" name="Text 0"/>
+          <p:cNvSpPr/>
+          <p:nvPr/>
+        </p:nvSpPr>
+        <p:spPr>
+          <a:xfrm>
             <a:off x="533387" y="381000"/>
             <a:ext cx="11658308" cy="190500"/>
           </a:xfrm>
@@ -8438,6 +9853,13 @@
             </a:outerShdw>
           </a:effectLst>
         </p:spPr>
+        <p:txBody>
+          <a:bodyPr/>
+          <a:lstStyle/>
+          <a:p>
+            <a:endParaRPr lang="zh-CN" altLang="en-US"/>
+          </a:p>
+        </p:txBody>
       </p:sp>
       <p:graphicFrame>
         <p:nvGraphicFramePr>
@@ -8456,8 +9878,20 @@
             <a:tbl>
               <a:tblPr/>
               <a:tblGrid>
-                <a:gridCol w="1319080"/>
-                <a:gridCol w="3075010"/>
+                <a:gridCol w="1319080">
+                  <a:extLst>
+                    <a:ext uri="{9D8B030D-6E8A-4147-A177-3AD203B41FA5}">
+                      <a16:colId xmlns:a16="http://schemas.microsoft.com/office/drawing/2014/main" val="20000"/>
+                    </a:ext>
+                  </a:extLst>
+                </a:gridCol>
+                <a:gridCol w="3075010">
+                  <a:extLst>
+                    <a:ext uri="{9D8B030D-6E8A-4147-A177-3AD203B41FA5}">
+                      <a16:colId xmlns:a16="http://schemas.microsoft.com/office/drawing/2014/main" val="20001"/>
+                    </a:ext>
+                  </a:extLst>
+                </a:gridCol>
               </a:tblGrid>
               <a:tr h="559977">
                 <a:tc>
@@ -8596,6 +10030,11 @@
                     </a:solidFill>
                   </a:tcPr>
                 </a:tc>
+                <a:extLst>
+                  <a:ext uri="{0D108BD9-81ED-4DB2-BD59-A6C34878D82A}">
+                    <a16:rowId xmlns:a16="http://schemas.microsoft.com/office/drawing/2014/main" val="10000"/>
+                  </a:ext>
+                </a:extLst>
               </a:tr>
               <a:tr h="559977">
                 <a:tc>
@@ -8734,6 +10173,11 @@
                     </a:solidFill>
                   </a:tcPr>
                 </a:tc>
+                <a:extLst>
+                  <a:ext uri="{0D108BD9-81ED-4DB2-BD59-A6C34878D82A}">
+                    <a16:rowId xmlns:a16="http://schemas.microsoft.com/office/drawing/2014/main" val="10001"/>
+                  </a:ext>
+                </a:extLst>
               </a:tr>
               <a:tr h="853260">
                 <a:tc>
@@ -8872,6 +10316,11 @@
                     </a:solidFill>
                   </a:tcPr>
                 </a:tc>
+                <a:extLst>
+                  <a:ext uri="{0D108BD9-81ED-4DB2-BD59-A6C34878D82A}">
+                    <a16:rowId xmlns:a16="http://schemas.microsoft.com/office/drawing/2014/main" val="10002"/>
+                  </a:ext>
+                </a:extLst>
               </a:tr>
               <a:tr h="559977">
                 <a:tc>
@@ -9010,6 +10459,11 @@
                     </a:solidFill>
                   </a:tcPr>
                 </a:tc>
+                <a:extLst>
+                  <a:ext uri="{0D108BD9-81ED-4DB2-BD59-A6C34878D82A}">
+                    <a16:rowId xmlns:a16="http://schemas.microsoft.com/office/drawing/2014/main" val="10003"/>
+                  </a:ext>
+                </a:extLst>
               </a:tr>
               <a:tr h="547277">
                 <a:tc>
@@ -9029,7 +10483,7 @@
                           <a:ea typeface="Funnel Sans" pitchFamily="34" charset="-122"/>
                           <a:cs typeface="Funnel Sans" pitchFamily="34" charset="-120"/>
                         </a:rPr>
-                        <a:t>D · optional</a:t>
+                        <a:t>D · in demo</a:t>
                       </a:r>
                       <a:endParaRPr lang="en-US" sz="1650" dirty="0">
                         <a:latin typeface="Funnel Sans" pitchFamily="34" charset="0"/>
@@ -9148,6 +10602,11 @@
                     </a:solidFill>
                   </a:tcPr>
                 </a:tc>
+                <a:extLst>
+                  <a:ext uri="{0D108BD9-81ED-4DB2-BD59-A6C34878D82A}">
+                    <a16:rowId xmlns:a16="http://schemas.microsoft.com/office/drawing/2014/main" val="10004"/>
+                  </a:ext>
+                </a:extLst>
               </a:tr>
             </a:tbl>
           </a:graphicData>
@@ -9210,7 +10669,7 @@
                 <a:ea typeface="Funnel Sans" pitchFamily="34" charset="-122"/>
                 <a:cs typeface="Funnel Sans" pitchFamily="34" charset="-120"/>
               </a:rPr>
-              <a:t>C/D: temporal-head value (optional research).</a:t>
+              <a:t>C/D: temporal-head value (D is in the demo).</a:t>
             </a:r>
             <a:endParaRPr lang="en-US" sz="1400" dirty="0"/>
           </a:p>
@@ -9671,718 +11130,6 @@
               <a:t>Recall = correct flags / all true omissions.</a:t>
             </a:r>
             <a:endParaRPr lang="en-US" sz="1250" dirty="0"/>
-          </a:p>
-        </p:txBody>
-      </p:sp>
-    </p:spTree>
-  </p:cSld>
-  <p:clrMapOvr>
-    <a:masterClrMapping/>
-  </p:clrMapOvr>
-</p:sld>
-</file>
-
-<file path=ppt/slides/slide9.xml><?xml version="1.0" encoding="utf-8"?>
-<p:sld xmlns:a="http://schemas.openxmlformats.org/drawingml/2006/main" xmlns:r="http://schemas.openxmlformats.org/officeDocument/2006/relationships" xmlns:p="http://schemas.openxmlformats.org/presentationml/2006/main">
-  <p:cSld>
-    <p:bg>
-      <p:bgPr>
-        <a:solidFill>
-          <a:srgbClr val="FAF5EB"/>
-        </a:solidFill>
-        <a:effectLst/>
-      </p:bgPr>
-    </p:bg>
-    <p:spTree>
-      <p:nvGrpSpPr>
-        <p:cNvPr id="1" name=""/>
-        <p:cNvGrpSpPr/>
-        <p:nvPr/>
-      </p:nvGrpSpPr>
-      <p:grpSpPr>
-        <a:xfrm>
-          <a:off x="0" y="0"/>
-          <a:ext cx="0" cy="0"/>
-          <a:chOff x="0" y="0"/>
-          <a:chExt cx="0" cy="0"/>
-        </a:xfrm>
-      </p:grpSpPr>
-      <p:sp>
-        <p:nvSpPr>
-          <p:cNvPr id="2" name="Text 0"/>
-          <p:cNvSpPr/>
-          <p:nvPr/>
-        </p:nvSpPr>
-        <p:spPr>
-          <a:xfrm>
-            <a:off x="609585" y="457200"/>
-            <a:ext cx="11582110" cy="190500"/>
-          </a:xfrm>
-          <a:prstGeom prst="rect">
-            <a:avLst/>
-          </a:prstGeom>
-          <a:noFill/>
-        </p:spPr>
-        <p:txBody>
-          <a:bodyPr wrap="none" lIns="0" tIns="0" rIns="0" bIns="0" rtlCol="0" anchor="t"/>
-          <a:lstStyle/>
-          <a:p>
-            <a:pPr marL="0" indent="0" algn="l">
-              <a:lnSpc>
-                <a:spcPct val="104000"/>
-              </a:lnSpc>
-              <a:buNone/>
-            </a:pPr>
-            <a:r>
-              <a:rPr lang="en-US" sz="1200" kern="100" spc="96" dirty="0">
-                <a:solidFill>
-                  <a:srgbClr val="8A3FA8"/>
-                </a:solidFill>
-                <a:latin typeface="Funnel Sans SemiBold" pitchFamily="34" charset="0"/>
-                <a:ea typeface="Funnel Sans SemiBold" pitchFamily="34" charset="-122"/>
-                <a:cs typeface="Funnel Sans SemiBold" pitchFamily="34" charset="-120"/>
-              </a:rPr>
-              <a:t>WHAT ALREADY WORKS</a:t>
-            </a:r>
-            <a:endParaRPr lang="en-US" sz="1200" dirty="0"/>
-          </a:p>
-        </p:txBody>
-      </p:sp>
-      <p:sp>
-        <p:nvSpPr>
-          <p:cNvPr id="3" name="Text 1"/>
-          <p:cNvSpPr/>
-          <p:nvPr/>
-        </p:nvSpPr>
-        <p:spPr>
-          <a:xfrm>
-            <a:off x="609585" y="733425"/>
-            <a:ext cx="10972526" cy="484584"/>
-          </a:xfrm>
-          <a:prstGeom prst="rect">
-            <a:avLst/>
-          </a:prstGeom>
-          <a:noFill/>
-        </p:spPr>
-        <p:txBody>
-          <a:bodyPr wrap="none" lIns="0" tIns="0" rIns="0" bIns="0" rtlCol="0" anchor="t"/>
-          <a:lstStyle/>
-          <a:p>
-            <a:pPr marL="0" indent="0" algn="l">
-              <a:lnSpc>
-                <a:spcPct val="88000"/>
-              </a:lnSpc>
-              <a:buNone/>
-            </a:pPr>
-            <a:r>
-              <a:rPr lang="en-US" sz="3600" kern="100" spc="-36" dirty="0">
-                <a:solidFill>
-                  <a:srgbClr val="051D3A"/>
-                </a:solidFill>
-                <a:latin typeface="Funnel Display Medium" pitchFamily="34" charset="0"/>
-                <a:ea typeface="Funnel Display Medium" pitchFamily="34" charset="-122"/>
-                <a:cs typeface="Funnel Display Medium" pitchFamily="34" charset="-120"/>
-              </a:rPr>
-              <a:t>Progress so far</a:t>
-            </a:r>
-            <a:endParaRPr lang="en-US" sz="3600" dirty="0"/>
-          </a:p>
-        </p:txBody>
-      </p:sp>
-      <p:sp>
-        <p:nvSpPr>
-          <p:cNvPr id="4" name="Shape 2"/>
-          <p:cNvSpPr/>
-          <p:nvPr/>
-        </p:nvSpPr>
-        <p:spPr>
-          <a:xfrm>
-            <a:off x="609585" y="1553369"/>
-            <a:ext cx="3454314" cy="3530005"/>
-          </a:xfrm>
-          <a:prstGeom prst="roundRect">
-            <a:avLst>
-              <a:gd name="adj" fmla="val 2548"/>
-            </a:avLst>
-          </a:prstGeom>
-          <a:solidFill>
-            <a:srgbClr val="FFFCF6"/>
-          </a:solidFill>
-          <a:effectLst>
-            <a:outerShdw blurRad="379730" dist="151130" dir="5400000" algn="bl" rotWithShape="0">
-              <a:srgbClr val="6A4FC8">
-                <a:alpha val="40000"/>
-              </a:srgbClr>
-            </a:outerShdw>
-          </a:effectLst>
-        </p:spPr>
-      </p:sp>
-      <p:pic>
-        <p:nvPicPr>
-          <p:cNvPr id="5" name="Image 0" descr="preencoded.png"/>
-          <p:cNvPicPr>
-            <a:picLocks noChangeAspect="1"/>
-          </p:cNvPicPr>
-          <p:nvPr/>
-        </p:nvPicPr>
-        <p:blipFill>
-          <a:blip r:embed="rId1"/>
-          <a:stretch>
-            <a:fillRect/>
-          </a:stretch>
-        </p:blipFill>
-        <p:spPr>
-          <a:xfrm>
-            <a:off x="863578" y="1832769"/>
-            <a:ext cx="523862" cy="523875"/>
-          </a:xfrm>
-          <a:prstGeom prst="rect">
-            <a:avLst/>
-          </a:prstGeom>
-        </p:spPr>
-      </p:pic>
-      <p:sp>
-        <p:nvSpPr>
-          <p:cNvPr id="6" name="Text 3"/>
-          <p:cNvSpPr/>
-          <p:nvPr/>
-        </p:nvSpPr>
-        <p:spPr>
-          <a:xfrm>
-            <a:off x="863578" y="2477294"/>
-            <a:ext cx="2946326" cy="281880"/>
-          </a:xfrm>
-          <a:prstGeom prst="rect">
-            <a:avLst/>
-          </a:prstGeom>
-          <a:noFill/>
-        </p:spPr>
-        <p:txBody>
-          <a:bodyPr wrap="none" lIns="0" tIns="0" rIns="0" bIns="0" rtlCol="0" anchor="t"/>
-          <a:lstStyle/>
-          <a:p>
-            <a:pPr marL="0" indent="0" algn="l">
-              <a:lnSpc>
-                <a:spcPct val="100000"/>
-              </a:lnSpc>
-              <a:buNone/>
-            </a:pPr>
-            <a:r>
-              <a:rPr lang="en-US" sz="1850" kern="100" spc="-9" dirty="0">
-                <a:solidFill>
-                  <a:srgbClr val="2B3541"/>
-                </a:solidFill>
-                <a:latin typeface="Funnel Sans SemiBold" pitchFamily="34" charset="0"/>
-                <a:ea typeface="Funnel Sans SemiBold" pitchFamily="34" charset="-122"/>
-                <a:cs typeface="Funnel Sans SemiBold" pitchFamily="34" charset="-120"/>
-              </a:rPr>
-              <a:t>Repository and contracts</a:t>
-            </a:r>
-            <a:endParaRPr lang="en-US" sz="1850" dirty="0"/>
-          </a:p>
-        </p:txBody>
-      </p:sp>
-      <p:sp>
-        <p:nvSpPr>
-          <p:cNvPr id="7" name="Text 4"/>
-          <p:cNvSpPr/>
-          <p:nvPr/>
-        </p:nvSpPr>
-        <p:spPr>
-          <a:xfrm>
-            <a:off x="863578" y="2908399"/>
-            <a:ext cx="2946326" cy="1364853"/>
-          </a:xfrm>
-          <a:prstGeom prst="rect">
-            <a:avLst/>
-          </a:prstGeom>
-          <a:noFill/>
-        </p:spPr>
-        <p:txBody>
-          <a:bodyPr wrap="square" lIns="0" tIns="0" rIns="0" bIns="0" rtlCol="0" anchor="t">
-            <a:normAutofit/>
-          </a:bodyPr>
-          <a:lstStyle/>
-          <a:p>
-            <a:pPr marL="0" indent="0" algn="l">
-              <a:lnSpc>
-                <a:spcPct val="117000"/>
-              </a:lnSpc>
-              <a:spcAft>
-                <a:spcPts val="900"/>
-              </a:spcAft>
-              <a:buNone/>
-            </a:pPr>
-            <a:r>
-              <a:rPr lang="en-US" sz="1400" dirty="0">
-                <a:solidFill>
-                  <a:srgbClr val="2B3541"/>
-                </a:solidFill>
-                <a:latin typeface="Funnel Sans" pitchFamily="34" charset="0"/>
-                <a:ea typeface="Funnel Sans" pitchFamily="34" charset="-122"/>
-                <a:cs typeface="Funnel Sans" pitchFamily="34" charset="-120"/>
-              </a:rPr>
-              <a:t>Five layers and five CLI pipelines: prepare, train, evaluate, infer, assess.</a:t>
-            </a:r>
-            <a:endParaRPr lang="en-US" sz="1400" dirty="0"/>
-          </a:p>
-          <a:p>
-            <a:pPr marL="0" indent="0" algn="l">
-              <a:lnSpc>
-                <a:spcPct val="117000"/>
-              </a:lnSpc>
-              <a:buNone/>
-            </a:pPr>
-            <a:r>
-              <a:rPr lang="en-US" sz="1400" dirty="0">
-                <a:solidFill>
-                  <a:srgbClr val="2B3541"/>
-                </a:solidFill>
-                <a:latin typeface="Funnel Sans" pitchFamily="34" charset="0"/>
-                <a:ea typeface="Funnel Sans" pitchFamily="34" charset="-122"/>
-                <a:cs typeface="Funnel Sans" pitchFamily="34" charset="-120"/>
-              </a:rPr>
-              <a:t>396 contract-layer tests documented; no data or GPU required. CI workflow configured.</a:t>
-            </a:r>
-            <a:endParaRPr lang="en-US" sz="1400" dirty="0"/>
-          </a:p>
-        </p:txBody>
-      </p:sp>
-      <p:sp>
-        <p:nvSpPr>
-          <p:cNvPr id="8" name="Shape 5"/>
-          <p:cNvSpPr/>
-          <p:nvPr/>
-        </p:nvSpPr>
-        <p:spPr>
-          <a:xfrm>
-            <a:off x="4368691" y="1553369"/>
-            <a:ext cx="3454314" cy="3530005"/>
-          </a:xfrm>
-          <a:prstGeom prst="roundRect">
-            <a:avLst>
-              <a:gd name="adj" fmla="val 2548"/>
-            </a:avLst>
-          </a:prstGeom>
-          <a:solidFill>
-            <a:srgbClr val="FFFCF6"/>
-          </a:solidFill>
-          <a:effectLst>
-            <a:outerShdw blurRad="379730" dist="151130" dir="5400000" algn="bl" rotWithShape="0">
-              <a:srgbClr val="6A4FC8">
-                <a:alpha val="40000"/>
-              </a:srgbClr>
-            </a:outerShdw>
-          </a:effectLst>
-        </p:spPr>
-      </p:sp>
-      <p:pic>
-        <p:nvPicPr>
-          <p:cNvPr id="9" name="Image 1" descr="preencoded.png"/>
-          <p:cNvPicPr>
-            <a:picLocks noChangeAspect="1"/>
-          </p:cNvPicPr>
-          <p:nvPr/>
-        </p:nvPicPr>
-        <p:blipFill>
-          <a:blip r:embed="rId2"/>
-          <a:stretch>
-            <a:fillRect/>
-          </a:stretch>
-        </p:blipFill>
-        <p:spPr>
-          <a:xfrm>
-            <a:off x="4622684" y="1832769"/>
-            <a:ext cx="523862" cy="523875"/>
-          </a:xfrm>
-          <a:prstGeom prst="rect">
-            <a:avLst/>
-          </a:prstGeom>
-        </p:spPr>
-      </p:pic>
-      <p:sp>
-        <p:nvSpPr>
-          <p:cNvPr id="10" name="Text 6"/>
-          <p:cNvSpPr/>
-          <p:nvPr/>
-        </p:nvSpPr>
-        <p:spPr>
-          <a:xfrm>
-            <a:off x="4622684" y="2477294"/>
-            <a:ext cx="2946326" cy="563761"/>
-          </a:xfrm>
-          <a:prstGeom prst="rect">
-            <a:avLst/>
-          </a:prstGeom>
-          <a:noFill/>
-        </p:spPr>
-        <p:txBody>
-          <a:bodyPr wrap="square" lIns="0" tIns="0" rIns="0" bIns="0" rtlCol="0" anchor="t">
-            <a:normAutofit/>
-          </a:bodyPr>
-          <a:lstStyle/>
-          <a:p>
-            <a:pPr marL="0" indent="0" algn="l">
-              <a:lnSpc>
-                <a:spcPct val="100000"/>
-              </a:lnSpc>
-              <a:buNone/>
-            </a:pPr>
-            <a:r>
-              <a:rPr lang="en-US" sz="1850" kern="100" spc="-9" dirty="0">
-                <a:solidFill>
-                  <a:srgbClr val="2B3541"/>
-                </a:solidFill>
-                <a:latin typeface="Funnel Sans SemiBold" pitchFamily="34" charset="0"/>
-                <a:ea typeface="Funnel Sans SemiBold" pitchFamily="34" charset="-122"/>
-                <a:cs typeface="Funnel Sans SemiBold" pitchFamily="34" charset="-120"/>
-              </a:rPr>
-              <a:t>Data safeguards and report rules</a:t>
-            </a:r>
-            <a:endParaRPr lang="en-US" sz="1850" dirty="0"/>
-          </a:p>
-        </p:txBody>
-      </p:sp>
-      <p:sp>
-        <p:nvSpPr>
-          <p:cNvPr id="11" name="Text 7"/>
-          <p:cNvSpPr/>
-          <p:nvPr/>
-        </p:nvSpPr>
-        <p:spPr>
-          <a:xfrm>
-            <a:off x="4622684" y="3190280"/>
-            <a:ext cx="2946326" cy="1613694"/>
-          </a:xfrm>
-          <a:prstGeom prst="rect">
-            <a:avLst/>
-          </a:prstGeom>
-          <a:noFill/>
-        </p:spPr>
-        <p:txBody>
-          <a:bodyPr wrap="square" lIns="0" tIns="0" rIns="0" bIns="0" rtlCol="0" anchor="t">
-            <a:normAutofit/>
-          </a:bodyPr>
-          <a:lstStyle/>
-          <a:p>
-            <a:pPr marL="0" indent="0" algn="l">
-              <a:lnSpc>
-                <a:spcPct val="117000"/>
-              </a:lnSpc>
-              <a:spcAft>
-                <a:spcPts val="900"/>
-              </a:spcAft>
-              <a:buNone/>
-            </a:pPr>
-            <a:r>
-              <a:rPr lang="en-US" sz="1400" dirty="0">
-                <a:solidFill>
-                  <a:srgbClr val="2B3541"/>
-                </a:solidFill>
-                <a:latin typeface="Funnel Sans" pitchFamily="34" charset="0"/>
-                <a:ea typeface="Funnel Sans" pitchFamily="34" charset="-122"/>
-                <a:cs typeface="Funnel Sans" pitchFamily="34" charset="-120"/>
-              </a:rPr>
-              <a:t>Three independent video-split guards and one authoritative label space, including METC 0–6.</a:t>
-            </a:r>
-            <a:endParaRPr lang="en-US" sz="1400" dirty="0"/>
-          </a:p>
-          <a:p>
-            <a:pPr marL="0" indent="0" algn="l">
-              <a:lnSpc>
-                <a:spcPct val="117000"/>
-              </a:lnSpc>
-              <a:buNone/>
-            </a:pPr>
-            <a:r>
-              <a:rPr lang="en-US" sz="1400" dirty="0">
-                <a:solidFill>
-                  <a:srgbClr val="2B3541"/>
-                </a:solidFill>
-                <a:latin typeface="Funnel Sans" pitchFamily="34" charset="0"/>
-                <a:ea typeface="Funnel Sans" pitchFamily="34" charset="-122"/>
-                <a:cs typeface="Funnel Sans" pitchFamily="34" charset="-120"/>
-              </a:rPr>
-              <a:t>Missed steps, order inversions, short steps, repetitions and overall score are implemented.</a:t>
-            </a:r>
-            <a:endParaRPr lang="en-US" sz="1400" dirty="0"/>
-          </a:p>
-        </p:txBody>
-      </p:sp>
-      <p:sp>
-        <p:nvSpPr>
-          <p:cNvPr id="12" name="Shape 8"/>
-          <p:cNvSpPr/>
-          <p:nvPr/>
-        </p:nvSpPr>
-        <p:spPr>
-          <a:xfrm>
-            <a:off x="8127797" y="1553369"/>
-            <a:ext cx="3454314" cy="3530005"/>
-          </a:xfrm>
-          <a:prstGeom prst="roundRect">
-            <a:avLst>
-              <a:gd name="adj" fmla="val 2548"/>
-            </a:avLst>
-          </a:prstGeom>
-          <a:solidFill>
-            <a:srgbClr val="FFFCF6"/>
-          </a:solidFill>
-          <a:effectLst>
-            <a:outerShdw blurRad="379730" dist="151130" dir="5400000" algn="bl" rotWithShape="0">
-              <a:srgbClr val="6A4FC8">
-                <a:alpha val="40000"/>
-              </a:srgbClr>
-            </a:outerShdw>
-          </a:effectLst>
-        </p:spPr>
-      </p:sp>
-      <p:pic>
-        <p:nvPicPr>
-          <p:cNvPr id="13" name="Image 2" descr="preencoded.png"/>
-          <p:cNvPicPr>
-            <a:picLocks noChangeAspect="1"/>
-          </p:cNvPicPr>
-          <p:nvPr/>
-        </p:nvPicPr>
-        <p:blipFill>
-          <a:blip r:embed="rId3"/>
-          <a:stretch>
-            <a:fillRect/>
-          </a:stretch>
-        </p:blipFill>
-        <p:spPr>
-          <a:xfrm>
-            <a:off x="8381790" y="1832769"/>
-            <a:ext cx="523862" cy="523875"/>
-          </a:xfrm>
-          <a:prstGeom prst="rect">
-            <a:avLst/>
-          </a:prstGeom>
-        </p:spPr>
-      </p:pic>
-      <p:sp>
-        <p:nvSpPr>
-          <p:cNvPr id="14" name="Text 9"/>
-          <p:cNvSpPr/>
-          <p:nvPr/>
-        </p:nvSpPr>
-        <p:spPr>
-          <a:xfrm>
-            <a:off x="8381790" y="2477294"/>
-            <a:ext cx="2946326" cy="281880"/>
-          </a:xfrm>
-          <a:prstGeom prst="rect">
-            <a:avLst/>
-          </a:prstGeom>
-          <a:noFill/>
-        </p:spPr>
-        <p:txBody>
-          <a:bodyPr wrap="none" lIns="0" tIns="0" rIns="0" bIns="0" rtlCol="0" anchor="t"/>
-          <a:lstStyle/>
-          <a:p>
-            <a:pPr marL="0" indent="0" algn="l">
-              <a:lnSpc>
-                <a:spcPct val="100000"/>
-              </a:lnSpc>
-              <a:buNone/>
-            </a:pPr>
-            <a:r>
-              <a:rPr lang="en-US" sz="1850" kern="100" spc="-9" dirty="0">
-                <a:solidFill>
-                  <a:srgbClr val="2B3541"/>
-                </a:solidFill>
-                <a:latin typeface="Funnel Sans SemiBold" pitchFamily="34" charset="0"/>
-                <a:ea typeface="Funnel Sans SemiBold" pitchFamily="34" charset="-122"/>
-                <a:cs typeface="Funnel Sans SemiBold" pitchFamily="34" charset="-120"/>
-              </a:rPr>
-              <a:t>Live product code</a:t>
-            </a:r>
-            <a:endParaRPr lang="en-US" sz="1850" dirty="0"/>
-          </a:p>
-        </p:txBody>
-      </p:sp>
-      <p:sp>
-        <p:nvSpPr>
-          <p:cNvPr id="15" name="Text 10"/>
-          <p:cNvSpPr/>
-          <p:nvPr/>
-        </p:nvSpPr>
-        <p:spPr>
-          <a:xfrm>
-            <a:off x="8381790" y="2908399"/>
-            <a:ext cx="2946326" cy="1364853"/>
-          </a:xfrm>
-          <a:prstGeom prst="rect">
-            <a:avLst/>
-          </a:prstGeom>
-          <a:noFill/>
-        </p:spPr>
-        <p:txBody>
-          <a:bodyPr wrap="square" lIns="0" tIns="0" rIns="0" bIns="0" rtlCol="0" anchor="t">
-            <a:normAutofit/>
-          </a:bodyPr>
-          <a:lstStyle/>
-          <a:p>
-            <a:pPr marL="0" indent="0" algn="l">
-              <a:lnSpc>
-                <a:spcPct val="117000"/>
-              </a:lnSpc>
-              <a:spcAft>
-                <a:spcPts val="900"/>
-              </a:spcAft>
-              <a:buNone/>
-            </a:pPr>
-            <a:r>
-              <a:rPr lang="en-US" sz="1400" dirty="0">
-                <a:solidFill>
-                  <a:srgbClr val="2B3541"/>
-                </a:solidFill>
-                <a:latin typeface="Funnel Sans" pitchFamily="34" charset="0"/>
-                <a:ea typeface="Funnel Sans" pitchFamily="34" charset="-122"/>
-                <a:cs typeface="Funnel Sans" pitchFamily="34" charset="-120"/>
-              </a:rPr>
-              <a:t>Live inference backend and local camera page are in place at code level.</a:t>
-            </a:r>
-            <a:endParaRPr lang="en-US" sz="1400" dirty="0"/>
-          </a:p>
-          <a:p>
-            <a:pPr marL="0" indent="0" algn="l">
-              <a:lnSpc>
-                <a:spcPct val="117000"/>
-              </a:lnSpc>
-              <a:buNone/>
-            </a:pPr>
-            <a:r>
-              <a:rPr lang="en-US" sz="1400" dirty="0">
-                <a:solidFill>
-                  <a:srgbClr val="2B3541"/>
-                </a:solidFill>
-                <a:latin typeface="Funnel Sans" pitchFamily="34" charset="0"/>
-                <a:ea typeface="Funnel Sans" pitchFamily="34" charset="-122"/>
-                <a:cs typeface="Funnel Sans" pitchFamily="34" charset="-120"/>
-              </a:rPr>
-              <a:t>Demo entry: </a:t>
-            </a:r>
-            <a:r>
-              <a:rPr lang="en-US" sz="1400" dirty="0">
-                <a:solidFill>
-                  <a:srgbClr val="2B3541"/>
-                </a:solidFill>
-                <a:highlight>
-                  <a:srgbClr val="FFFCF6"/>
-                </a:highlight>
-                <a:latin typeface="Consolas" pitchFamily="34" charset="0"/>
-                <a:ea typeface="Consolas" pitchFamily="34" charset="-122"/>
-                <a:cs typeface="Consolas" pitchFamily="34" charset="-120"/>
-              </a:rPr>
-              <a:t>python scripts/run_camera.py --demo-exp</a:t>
-            </a:r>
-            <a:endParaRPr lang="en-US" sz="1400" dirty="0"/>
-          </a:p>
-        </p:txBody>
-      </p:sp>
-      <p:sp>
-        <p:nvSpPr>
-          <p:cNvPr id="16" name="Text 11"/>
-          <p:cNvSpPr/>
-          <p:nvPr/>
-        </p:nvSpPr>
-        <p:spPr>
-          <a:xfrm>
-            <a:off x="609585" y="5418733"/>
-            <a:ext cx="10972526" cy="335260"/>
-          </a:xfrm>
-          <a:prstGeom prst="rect">
-            <a:avLst/>
-          </a:prstGeom>
-          <a:noFill/>
-        </p:spPr>
-        <p:txBody>
-          <a:bodyPr wrap="none" lIns="0" tIns="0" rIns="0" bIns="0" rtlCol="0" anchor="t"/>
-          <a:lstStyle/>
-          <a:p>
-            <a:pPr marL="0" indent="0" algn="l">
-              <a:lnSpc>
-                <a:spcPct val="100000"/>
-              </a:lnSpc>
-              <a:buNone/>
-            </a:pPr>
-            <a:r>
-              <a:rPr lang="en-US" sz="2200" kern="100" spc="-11" dirty="0">
-                <a:solidFill>
-                  <a:srgbClr val="B8367F"/>
-                </a:solidFill>
-                <a:latin typeface="Funnel Sans SemiBold" pitchFamily="34" charset="0"/>
-                <a:ea typeface="Funnel Sans SemiBold" pitchFamily="34" charset="-122"/>
-                <a:cs typeface="Funnel Sans SemiBold" pitchFamily="34" charset="-120"/>
-              </a:rPr>
-              <a:t>No formal experimental result yet (version 0.1.0).</a:t>
-            </a:r>
-            <a:endParaRPr lang="en-US" sz="2200" dirty="0"/>
-          </a:p>
-        </p:txBody>
-      </p:sp>
-      <p:sp>
-        <p:nvSpPr>
-          <p:cNvPr id="17" name="Text 12"/>
-          <p:cNvSpPr/>
-          <p:nvPr/>
-        </p:nvSpPr>
-        <p:spPr>
-          <a:xfrm>
-            <a:off x="609585" y="5903218"/>
-            <a:ext cx="10972526" cy="497681"/>
-          </a:xfrm>
-          <a:prstGeom prst="rect">
-            <a:avLst/>
-          </a:prstGeom>
-          <a:noFill/>
-        </p:spPr>
-        <p:txBody>
-          <a:bodyPr wrap="square" lIns="0" tIns="0" rIns="0" bIns="0" rtlCol="0" anchor="t">
-            <a:normAutofit/>
-          </a:bodyPr>
-          <a:lstStyle/>
-          <a:p>
-            <a:pPr marL="0" indent="0" algn="l">
-              <a:lnSpc>
-                <a:spcPct val="117000"/>
-              </a:lnSpc>
-              <a:buNone/>
-            </a:pPr>
-            <a:r>
-              <a:rPr lang="en-US" sz="1400" dirty="0">
-                <a:solidFill>
-                  <a:srgbClr val="2B3541"/>
-                </a:solidFill>
-                <a:latin typeface="Funnel Sans" pitchFamily="34" charset="0"/>
-                <a:ea typeface="Funnel Sans" pitchFamily="34" charset="-122"/>
-                <a:cs typeface="Funnel Sans" pitchFamily="34" charset="-120"/>
-              </a:rPr>
-              <a:t>The synthetic smoke run proves pipeline execution only. Demo weights check feasibility, not accuracy.</a:t>
-            </a:r>
-            <a:endParaRPr lang="en-US" sz="1400" dirty="0"/>
-          </a:p>
-          <a:p>
-            <a:pPr marL="0" indent="0" algn="l">
-              <a:lnSpc>
-                <a:spcPct val="117000"/>
-              </a:lnSpc>
-              <a:buNone/>
-            </a:pPr>
-            <a:r>
-              <a:rPr lang="en-US" sz="1400" dirty="0">
-                <a:solidFill>
-                  <a:srgbClr val="2B3541"/>
-                </a:solidFill>
-                <a:latin typeface="Funnel Sans" pitchFamily="34" charset="0"/>
-                <a:ea typeface="Funnel Sans" pitchFamily="34" charset="-122"/>
-                <a:cs typeface="Funnel Sans" pitchFamily="34" charset="-120"/>
-              </a:rPr>
-              <a:t>Real-camera classification accuracy and latency remain unmeasured.</a:t>
-            </a:r>
-            <a:endParaRPr lang="en-US" sz="1400" dirty="0"/>
           </a:p>
         </p:txBody>
       </p:sp>
@@ -10395,73 +11142,73 @@
 </file>
 
 <file path=ppt/tags/tag1.xml><?xml version="1.0" encoding="utf-8"?>
-<p:tagLst xmlns:p="http://schemas.openxmlformats.org/presentationml/2006/main">
+<p:tagLst xmlns:a="http://schemas.openxmlformats.org/drawingml/2006/main" xmlns:r="http://schemas.openxmlformats.org/officeDocument/2006/relationships" xmlns:p="http://schemas.openxmlformats.org/presentationml/2006/main">
   <p:tag name="KSO_WM_DIAGRAM_VIRTUALLY_FRAME" val="{&quot;height&quot;:173.08590551181103,&quot;left&quot;:47.9988188976378,&quot;top&quot;:112.15622047244094,&quot;width&quot;:863.9784251968504}"/>
 </p:tagLst>
 </file>
 
 <file path=ppt/tags/tag10.xml><?xml version="1.0" encoding="utf-8"?>
-<p:tagLst xmlns:p="http://schemas.openxmlformats.org/presentationml/2006/main">
+<p:tagLst xmlns:a="http://schemas.openxmlformats.org/drawingml/2006/main" xmlns:r="http://schemas.openxmlformats.org/officeDocument/2006/relationships" xmlns:p="http://schemas.openxmlformats.org/presentationml/2006/main">
   <p:tag name="KSO_WM_DIAGRAM_VIRTUALLY_FRAME" val="{&quot;height&quot;:173.08590551181103,&quot;left&quot;:47.9988188976378,&quot;top&quot;:112.15622047244094,&quot;width&quot;:863.9784251968504}"/>
 </p:tagLst>
 </file>
 
 <file path=ppt/tags/tag11.xml><?xml version="1.0" encoding="utf-8"?>
-<p:tagLst xmlns:p="http://schemas.openxmlformats.org/presentationml/2006/main">
+<p:tagLst xmlns:a="http://schemas.openxmlformats.org/drawingml/2006/main" xmlns:r="http://schemas.openxmlformats.org/officeDocument/2006/relationships" xmlns:p="http://schemas.openxmlformats.org/presentationml/2006/main">
   <p:tag name="KSO_WM_DIAGRAM_VIRTUALLY_FRAME" val="{&quot;height&quot;:173.08590551181103,&quot;left&quot;:47.9988188976378,&quot;top&quot;:112.15622047244094,&quot;width&quot;:863.9784251968504}"/>
 </p:tagLst>
 </file>
 
 <file path=ppt/tags/tag12.xml><?xml version="1.0" encoding="utf-8"?>
-<p:tagLst xmlns:p="http://schemas.openxmlformats.org/presentationml/2006/main">
+<p:tagLst xmlns:a="http://schemas.openxmlformats.org/drawingml/2006/main" xmlns:r="http://schemas.openxmlformats.org/officeDocument/2006/relationships" xmlns:p="http://schemas.openxmlformats.org/presentationml/2006/main">
   <p:tag name="KSO_WM_DIAGRAM_VIRTUALLY_FRAME" val="{&quot;height&quot;:173.08590551181103,&quot;left&quot;:47.9988188976378,&quot;top&quot;:112.15622047244094,&quot;width&quot;:863.9784251968504}"/>
 </p:tagLst>
 </file>
 
 <file path=ppt/tags/tag2.xml><?xml version="1.0" encoding="utf-8"?>
-<p:tagLst xmlns:p="http://schemas.openxmlformats.org/presentationml/2006/main">
+<p:tagLst xmlns:a="http://schemas.openxmlformats.org/drawingml/2006/main" xmlns:r="http://schemas.openxmlformats.org/officeDocument/2006/relationships" xmlns:p="http://schemas.openxmlformats.org/presentationml/2006/main">
   <p:tag name="KSO_WM_DIAGRAM_VIRTUALLY_FRAME" val="{&quot;height&quot;:173.08590551181103,&quot;left&quot;:47.9988188976378,&quot;top&quot;:112.15622047244094,&quot;width&quot;:863.9784251968504}"/>
 </p:tagLst>
 </file>
 
 <file path=ppt/tags/tag3.xml><?xml version="1.0" encoding="utf-8"?>
-<p:tagLst xmlns:p="http://schemas.openxmlformats.org/presentationml/2006/main">
+<p:tagLst xmlns:a="http://schemas.openxmlformats.org/drawingml/2006/main" xmlns:r="http://schemas.openxmlformats.org/officeDocument/2006/relationships" xmlns:p="http://schemas.openxmlformats.org/presentationml/2006/main">
   <p:tag name="KSO_WM_DIAGRAM_VIRTUALLY_FRAME" val="{&quot;height&quot;:173.08590551181103,&quot;left&quot;:47.9988188976378,&quot;top&quot;:112.15622047244094,&quot;width&quot;:863.9784251968504}"/>
 </p:tagLst>
 </file>
 
 <file path=ppt/tags/tag4.xml><?xml version="1.0" encoding="utf-8"?>
-<p:tagLst xmlns:p="http://schemas.openxmlformats.org/presentationml/2006/main">
+<p:tagLst xmlns:a="http://schemas.openxmlformats.org/drawingml/2006/main" xmlns:r="http://schemas.openxmlformats.org/officeDocument/2006/relationships" xmlns:p="http://schemas.openxmlformats.org/presentationml/2006/main">
   <p:tag name="KSO_WM_DIAGRAM_VIRTUALLY_FRAME" val="{&quot;height&quot;:173.08590551181103,&quot;left&quot;:47.9988188976378,&quot;top&quot;:112.15622047244094,&quot;width&quot;:863.9784251968504}"/>
 </p:tagLst>
 </file>
 
 <file path=ppt/tags/tag5.xml><?xml version="1.0" encoding="utf-8"?>
-<p:tagLst xmlns:p="http://schemas.openxmlformats.org/presentationml/2006/main">
+<p:tagLst xmlns:a="http://schemas.openxmlformats.org/drawingml/2006/main" xmlns:r="http://schemas.openxmlformats.org/officeDocument/2006/relationships" xmlns:p="http://schemas.openxmlformats.org/presentationml/2006/main">
   <p:tag name="KSO_WM_DIAGRAM_VIRTUALLY_FRAME" val="{&quot;height&quot;:173.08590551181103,&quot;left&quot;:47.9988188976378,&quot;top&quot;:112.15622047244094,&quot;width&quot;:863.9784251968504}"/>
 </p:tagLst>
 </file>
 
 <file path=ppt/tags/tag6.xml><?xml version="1.0" encoding="utf-8"?>
-<p:tagLst xmlns:p="http://schemas.openxmlformats.org/presentationml/2006/main">
+<p:tagLst xmlns:a="http://schemas.openxmlformats.org/drawingml/2006/main" xmlns:r="http://schemas.openxmlformats.org/officeDocument/2006/relationships" xmlns:p="http://schemas.openxmlformats.org/presentationml/2006/main">
   <p:tag name="KSO_WM_DIAGRAM_VIRTUALLY_FRAME" val="{&quot;height&quot;:173.08590551181103,&quot;left&quot;:47.9988188976378,&quot;top&quot;:112.15622047244094,&quot;width&quot;:863.9784251968504}"/>
 </p:tagLst>
 </file>
 
 <file path=ppt/tags/tag7.xml><?xml version="1.0" encoding="utf-8"?>
-<p:tagLst xmlns:p="http://schemas.openxmlformats.org/presentationml/2006/main">
+<p:tagLst xmlns:a="http://schemas.openxmlformats.org/drawingml/2006/main" xmlns:r="http://schemas.openxmlformats.org/officeDocument/2006/relationships" xmlns:p="http://schemas.openxmlformats.org/presentationml/2006/main">
   <p:tag name="KSO_WM_DIAGRAM_VIRTUALLY_FRAME" val="{&quot;height&quot;:173.08590551181103,&quot;left&quot;:47.9988188976378,&quot;top&quot;:112.15622047244094,&quot;width&quot;:863.9784251968504}"/>
 </p:tagLst>
 </file>
 
 <file path=ppt/tags/tag8.xml><?xml version="1.0" encoding="utf-8"?>
-<p:tagLst xmlns:p="http://schemas.openxmlformats.org/presentationml/2006/main">
+<p:tagLst xmlns:a="http://schemas.openxmlformats.org/drawingml/2006/main" xmlns:r="http://schemas.openxmlformats.org/officeDocument/2006/relationships" xmlns:p="http://schemas.openxmlformats.org/presentationml/2006/main">
   <p:tag name="KSO_WM_DIAGRAM_VIRTUALLY_FRAME" val="{&quot;height&quot;:173.08590551181103,&quot;left&quot;:47.9988188976378,&quot;top&quot;:112.15622047244094,&quot;width&quot;:863.9784251968504}"/>
 </p:tagLst>
 </file>
 
 <file path=ppt/tags/tag9.xml><?xml version="1.0" encoding="utf-8"?>
-<p:tagLst xmlns:p="http://schemas.openxmlformats.org/presentationml/2006/main">
+<p:tagLst xmlns:a="http://schemas.openxmlformats.org/drawingml/2006/main" xmlns:r="http://schemas.openxmlformats.org/officeDocument/2006/relationships" xmlns:p="http://schemas.openxmlformats.org/presentationml/2006/main">
   <p:tag name="KSO_WM_DIAGRAM_VIRTUALLY_FRAME" val="{&quot;height&quot;:173.08590551181103,&quot;left&quot;:47.9988188976378,&quot;top&quot;:112.15622047244094,&quot;width&quot;:863.9784251968504}"/>
 </p:tagLst>
 </file>
@@ -10717,6 +11464,8 @@
       </a:bgFillStyleLst>
     </a:fmtScheme>
   </a:themeElements>
+  <a:objectDefaults/>
+  <a:extraClrSchemeLst/>
   <a:extLst>
     <a:ext uri="{05A4C25C-085E-4340-85A3-A5531E510DB2}">
       <thm15:themeFamily xmlns:thm15="http://schemas.microsoft.com/office/thememl/2012/main" name="Office Theme" id="{62F939B6-93AF-4DB8-9C6B-D6C7DFDC589F}" vid="{4A3C46E8-61CC-4603-A589-7422A47A8E4A}"/>
@@ -10976,6 +11725,8 @@
       </a:bgFillStyleLst>
     </a:fmtScheme>
   </a:themeElements>
+  <a:objectDefaults/>
+  <a:extraClrSchemeLst/>
   <a:extLst>
     <a:ext uri="{05A4C25C-085E-4340-85A3-A5531E510DB2}">
       <thm15:themeFamily xmlns:thm15="http://schemas.microsoft.com/office/thememl/2012/main" name="Office Theme" id="{62F939B6-93AF-4DB8-9C6B-D6C7DFDC589F}" vid="{4A3C46E8-61CC-4603-A589-7422A47A8E4A}"/>
